--- a/Topic_A/Exam_Practice/AT-A-L03_Speaking_Workshop_Frequency_Sequencing_and_Communication.pptx
+++ b/Topic_A/Exam_Practice/AT-A-L03_Speaking_Workshop_Frequency_Sequencing_and_Communication.pptx
@@ -3326,7 +3326,7 @@
                 <a:latin typeface="Cambria" pitchFamily="34" charset="0"/>
                 <a:cs typeface="Amiri" pitchFamily="2" charset="-78"/>
               </a:rPr>
-              <a:t>Speaking Workshop — Frequency, Sequencing and Communication</a:t>
+              <a:t>Speaking Workshop — Frequency and Communication</a:t>
             </a:r>
             <a:endParaRPr lang="en-US" sz="2650" dirty="0"/>
           </a:p>
@@ -3364,7 +3364,7 @@
                 <a:latin typeface="Amiri" pitchFamily="2" charset="-78"/>
                 <a:cs typeface="Amiri" pitchFamily="2" charset="-78"/>
               </a:rPr>
-              <a:t>وَرْشَةُ التَّحَدُّثِ — التَّكْرَارُ وَالتَّرْتِيبُ وَالتَّوَاصُلُ</a:t>
+              <a:t>وَرْشَةُ التَّحَدُّثِ — التَّكْرَارُ وَالتَّوَاصُلُ</a:t>
             </a:r>
             <a:endParaRPr lang="ar-SA" sz="3600" dirty="0"/>
           </a:p>

--- a/Topic_A/Exam_Practice/AT-A-L03_Speaking_Workshop_Frequency_Sequencing_and_Communication.pptx
+++ b/Topic_A/Exam_Practice/AT-A-L03_Speaking_Workshop_Frequency_Sequencing_and_Communication.pptx
@@ -523,7 +523,11 @@
           <a:lstStyle/>
           <a:p>
             <a:r>
-              <a:rPr lang="en-US" dirty="0"/>
+              <a:rPr lang="ar-SA" dirty="0">
+                <a:latin typeface="Amiri" pitchFamily="2" charset="-78"/>
+                <a:ea typeface="Amiri" pitchFamily="2" charset="-78"/>
+                <a:cs typeface="Amiri" pitchFamily="2" charset="-78"/>
+              </a:rPr>
               <a:t>WORKSHOP AT A GLANCE — 60 minutes on Teams, mostly in breakout rooms of three.
 0–2 Welcome · 2–6 How Paper 3 works · 6–10 Language bank · 10–13 Breakout routine · 13–33 Role plays A–D in rooms (rotate roles) · 33–37 Role-play models (main room) · 37–50 Topic conversation in rooms · 50–55 Conversation models · 55–58 Feedback + self-check · 58–60 Close.
 Content: teacher-made exam scenarios for Advanced Topic A, Lesson 3 (Frequency, Sequencing and Communication, AT-A-L03), using that lesson’s language (frequency adverbs, connectors, قَبْلَ / بَعْدَ (أَنْ), عِنْدَمَا). Every task has Core · Develop · Stretch support and a model answer.
@@ -615,7 +619,11 @@
           <a:lstStyle/>
           <a:p>
             <a:r>
-              <a:rPr lang="en-US" dirty="0"/>
+              <a:rPr lang="ar-SA" dirty="0">
+                <a:latin typeface="Amiri" pitchFamily="2" charset="-78"/>
+                <a:ea typeface="Amiri" pitchFamily="2" charset="-78"/>
+                <a:cs typeface="Amiri" pitchFamily="2" charset="-78"/>
+              </a:rPr>
               <a:t>ROLE PLAY C (Develop) — with a new classmate.
 SET-UP IN THE BREAKOUT ROOM: A = examiner (reads the left column ONLY — the questions, in order), B = candidate (sees the task column; Core may use the help column), C = observer (ticks the feedback checklist). 1 minute preparation, about 3 minutes speaking, 1 minute feedback, then rotate.
 Task ! is the unexpected question: in the exam the candidate has not seen it — the examiner should read it without warning.
@@ -707,7 +715,11 @@
           <a:lstStyle/>
           <a:p>
             <a:r>
-              <a:rPr lang="en-US" dirty="0"/>
+              <a:rPr lang="ar-SA" dirty="0">
+                <a:latin typeface="Amiri" pitchFamily="2" charset="-78"/>
+                <a:ea typeface="Amiri" pitchFamily="2" charset="-78"/>
+                <a:cs typeface="Amiri" pitchFamily="2" charset="-78"/>
+              </a:rPr>
               <a:t>ROLE PLAY D (Stretch) — an interview for a school-magazine article.
 SET-UP IN THE BREAKOUT ROOM: A = examiner (reads the left column ONLY — the questions, in order), B = candidate (sees the task column; Core may use the help column), C = observer (ticks the feedback checklist). 1 minute preparation, about 3 minutes speaking, 1 minute feedback, then rotate.
 Task ! is the unexpected question: in the exam the candidate has not seen it — the examiner should read it without warning.
@@ -1243,7 +1255,11 @@
           <a:lstStyle/>
           <a:p>
             <a:r>
-              <a:rPr lang="en-US" dirty="0"/>
+              <a:rPr lang="ar-SA" dirty="0">
+                <a:latin typeface="Amiri" pitchFamily="2" charset="-78"/>
+                <a:ea typeface="Amiri" pitchFamily="2" charset="-78"/>
+                <a:cs typeface="Amiri" pitchFamily="2" charset="-78"/>
+              </a:rPr>
               <a:t>TOPIC CONVERSATION — Core. Examiner asks the questions in order and may add “لِمَاذَا؟ / هَلْ يُمْكِنُ أَنْ تَشْرَحَ أَكْثَرَ؟” to push for more. Candidate aims for one full sentence per question, with a frequency word.
 </a:t>
             </a:r>
@@ -1332,7 +1348,11 @@
           <a:lstStyle/>
           <a:p>
             <a:r>
-              <a:rPr lang="en-US" dirty="0"/>
+              <a:rPr lang="ar-SA" dirty="0">
+                <a:latin typeface="Amiri" pitchFamily="2" charset="-78"/>
+                <a:ea typeface="Amiri" pitchFamily="2" charset="-78"/>
+                <a:cs typeface="Amiri" pitchFamily="2" charset="-78"/>
+              </a:rPr>
               <a:t>TOPIC CONVERSATION — Develop. Examiner asks the questions in order and may add “لِمَاذَا؟ / هَلْ يُمْكِنُ أَنْ تَشْرَحَ أَكْثَرَ؟” to push for more. Candidate aims for two or three sentences, with connectors and a reason.
 </a:t>
             </a:r>
@@ -1421,7 +1441,11 @@
           <a:lstStyle/>
           <a:p>
             <a:r>
-              <a:rPr lang="en-US" dirty="0"/>
+              <a:rPr lang="ar-SA" dirty="0">
+                <a:latin typeface="Amiri" pitchFamily="2" charset="-78"/>
+                <a:ea typeface="Amiri" pitchFamily="2" charset="-78"/>
+                <a:cs typeface="Amiri" pitchFamily="2" charset="-78"/>
+              </a:rPr>
               <a:t>TOPIC CONVERSATION — Stretch. Examiner asks the questions in order and may add “لِمَاذَا؟ / هَلْ يُمْكِنُ أَنْ تَشْرَحَ أَكْثَرَ؟” to push for more. Candidate aims for a developed answer: opinion, comparison, reason and more than one time frame.
 </a:t>
             </a:r>
@@ -1510,7 +1534,11 @@
           <a:lstStyle/>
           <a:p>
             <a:r>
-              <a:rPr lang="en-US" dirty="0"/>
+              <a:rPr lang="ar-SA" dirty="0">
+                <a:latin typeface="Amiri" pitchFamily="2" charset="-78"/>
+                <a:ea typeface="Amiri" pitchFamily="2" charset="-78"/>
+                <a:cs typeface="Amiri" pitchFamily="2" charset="-78"/>
+              </a:rPr>
               <a:t>WELCOME (1 min) — while students join.
 • Greet each student by name as they arrive: السَّلَامُ عَلَيْكُمْ. Take the register (Pastoral Tracker: attendance 0/1).
 • 2-MINUTE CHECK-IN (SEND training): a private chat to any student who seemed unsettled last lesson — “Are you okay today? 👍 / 👎”.
@@ -2224,7 +2252,11 @@
           <a:lstStyle/>
           <a:p>
             <a:r>
-              <a:rPr lang="en-US" dirty="0"/>
+              <a:rPr lang="ar-SA" dirty="0">
+                <a:latin typeface="Amiri" pitchFamily="2" charset="-78"/>
+                <a:ea typeface="Amiri" pitchFamily="2" charset="-78"/>
+                <a:cs typeface="Amiri" pitchFamily="2" charset="-78"/>
+              </a:rPr>
               <a:t>TEACH (3 min). Role play = precise and complete; conversation = develop. Choral repetition of the repair phrases. To a girl: تُعِيدِي.</a:t>
             </a:r>
             <a:endParaRPr lang="en-US" dirty="0"/>
@@ -2312,7 +2344,11 @@
           <a:lstStyle/>
           <a:p>
             <a:r>
-              <a:rPr lang="en-US" dirty="0"/>
+              <a:rPr lang="ar-SA" dirty="0">
+                <a:latin typeface="Amiri" pitchFamily="2" charset="-78"/>
+                <a:ea typeface="Amiri" pitchFamily="2" charset="-78"/>
+                <a:cs typeface="Amiri" pitchFamily="2" charset="-78"/>
+              </a:rPr>
               <a:t>LANGUAGE BANK (2 min) — build a frequency ladder from دَائِمًا to لَا … أَبَدًا. Never: لَا أَتَأَخَّرُ أَبَدًا (the verb is negated with لَا). Once / twice / three times: مَرَّةً · مَرَّتَيْنِ · ثَلَاثَ مَرَّاتٍ.</a:t>
             </a:r>
             <a:endParaRPr lang="en-US" dirty="0"/>
@@ -2400,7 +2436,11 @@
           <a:lstStyle/>
           <a:p>
             <a:r>
-              <a:rPr lang="en-US" dirty="0"/>
+              <a:rPr lang="ar-SA" dirty="0">
+                <a:latin typeface="Amiri" pitchFamily="2" charset="-78"/>
+                <a:ea typeface="Amiri" pitchFamily="2" charset="-78"/>
+                <a:cs typeface="Amiri" pitchFamily="2" charset="-78"/>
+              </a:rPr>
               <a:t>LANGUAGE BANK (2 min) — communication verbs with four persons. Connectors: قَبْلَ أَنْ / بَعْدَ أَنْ + a verb in -a (قَبْلَ أَنْ أَنَامَ); عِنْدَمَا + an ordinary present or past verb. (The verb اتَّصَلَ takes the preposition bi- joined to the person: أَتَّصِلُ بِجَدَّتِي.)</a:t>
             </a:r>
             <a:endParaRPr lang="en-US" dirty="0"/>
@@ -2576,7 +2616,11 @@
           <a:lstStyle/>
           <a:p>
             <a:r>
-              <a:rPr lang="en-US" dirty="0"/>
+              <a:rPr lang="ar-SA" dirty="0">
+                <a:latin typeface="Amiri" pitchFamily="2" charset="-78"/>
+                <a:ea typeface="Amiri" pitchFamily="2" charset="-78"/>
+                <a:cs typeface="Amiri" pitchFamily="2" charset="-78"/>
+              </a:rPr>
               <a:t>ROLE PLAY A (Core) — a survey at the youth club.
 SET-UP IN THE BREAKOUT ROOM: A = examiner (reads the left column ONLY — the questions, in order), B = candidate (sees the task column; Core may use the help column), C = observer (ticks the feedback checklist). 1 minute preparation, about 3 minutes speaking, 1 minute feedback, then rotate.
 Task ! is the unexpected question: in the exam the candidate has not seen it — the examiner should read it without warning.
@@ -2668,7 +2712,11 @@
           <a:lstStyle/>
           <a:p>
             <a:r>
-              <a:rPr lang="en-US" dirty="0"/>
+              <a:rPr lang="ar-SA" dirty="0">
+                <a:latin typeface="Amiri" pitchFamily="2" charset="-78"/>
+                <a:ea typeface="Amiri" pitchFamily="2" charset="-78"/>
+                <a:cs typeface="Amiri" pitchFamily="2" charset="-78"/>
+              </a:rPr>
               <a:t>ROLE PLAY B (Core+) — a phone call with your grandmother.
 SET-UP IN THE BREAKOUT ROOM: A = examiner (reads the left column ONLY — the questions, in order), B = candidate (sees the task column; Core may use the help column), C = observer (ticks the feedback checklist). 1 minute preparation, about 3 minutes speaking, 1 minute feedback, then rotate.
 Task ! is the unexpected question: in the exam the candidate has not seen it — the examiner should read it without warning.
@@ -3156,6 +3204,7 @@
                   <a:srgbClr val="D4AF37"/>
                 </a:solidFill>
                 <a:latin typeface="Amiri" pitchFamily="2" charset="-78"/>
+                <a:ea typeface="Amiri" pitchFamily="2" charset="-78"/>
                 <a:cs typeface="Amiri" pitchFamily="2" charset="-78"/>
               </a:rPr>
               <a:t>م</a:t>
@@ -3362,6 +3411,7 @@
                   <a:srgbClr val="D4AF37"/>
                 </a:solidFill>
                 <a:latin typeface="Amiri" pitchFamily="2" charset="-78"/>
+                <a:ea typeface="Amiri" pitchFamily="2" charset="-78"/>
                 <a:cs typeface="Amiri" pitchFamily="2" charset="-78"/>
               </a:rPr>
               <a:t>وَرْشَةُ التَّحَدُّثِ — التَّكْرَارُ وَالتَّوَاصُلُ</a:t>
@@ -3819,6 +3869,7 @@
                   <a:srgbClr val="D4AF37"/>
                 </a:solidFill>
                 <a:latin typeface="Amiri" pitchFamily="2" charset="-78"/>
+                <a:ea typeface="Amiri" pitchFamily="2" charset="-78"/>
                 <a:cs typeface="Amiri" pitchFamily="2" charset="-78"/>
               </a:rPr>
               <a:t>م</a:t>
@@ -4139,6 +4190,7 @@
                   <a:srgbClr val="8A6D1E"/>
                 </a:solidFill>
                 <a:latin typeface="Amiri" pitchFamily="2" charset="-78"/>
+                <a:ea typeface="Amiri" pitchFamily="2" charset="-78"/>
                 <a:cs typeface="Amiri" pitchFamily="2" charset="-78"/>
               </a:rPr>
               <a:t>زَمِيلٌ جَدِيدٌ فِي الصَّفِّ</a:t>
@@ -4419,6 +4471,7 @@
                   <a:srgbClr val="1B3B6F"/>
                 </a:solidFill>
                 <a:latin typeface="Amiri" pitchFamily="2" charset="-78"/>
+                <a:ea typeface="Amiri" pitchFamily="2" charset="-78"/>
                 <a:cs typeface="Amiri" pitchFamily="2" charset="-78"/>
               </a:rPr>
               <a:t>أَوَّلًا … ثُمَّ … بَعْدَ ذٰلِكَ …</a:t>
@@ -4495,6 +4548,7 @@
                   <a:srgbClr val="1B3B6F"/>
                 </a:solidFill>
                 <a:latin typeface="Amiri" pitchFamily="2" charset="-78"/>
+                <a:ea typeface="Amiri" pitchFamily="2" charset="-78"/>
                 <a:cs typeface="Amiri" pitchFamily="2" charset="-78"/>
               </a:rPr>
               <a:t>مَاذَا يَحْدُثُ فِي الصَّبَاحِ عِنْدَمَا نَصِلُ؟</a:t>
@@ -4598,6 +4652,7 @@
                   <a:srgbClr val="1B3B6F"/>
                 </a:solidFill>
                 <a:latin typeface="Amiri" pitchFamily="2" charset="-78"/>
+                <a:ea typeface="Amiri" pitchFamily="2" charset="-78"/>
                 <a:cs typeface="Amiri" pitchFamily="2" charset="-78"/>
               </a:rPr>
               <a:t>عِنْدَنَا وَاجِبٌ … مَرَّاتٍ</a:t>
@@ -4674,6 +4729,7 @@
                   <a:srgbClr val="1B3B6F"/>
                 </a:solidFill>
                 <a:latin typeface="Amiri" pitchFamily="2" charset="-78"/>
+                <a:ea typeface="Amiri" pitchFamily="2" charset="-78"/>
                 <a:cs typeface="Amiri" pitchFamily="2" charset="-78"/>
               </a:rPr>
               <a:t>كَمْ مَرَّةً عِنْدَنَا وَاجِبٌ فِي العَرَبِيَّةِ؟</a:t>
@@ -4777,6 +4833,7 @@
                   <a:srgbClr val="1B3B6F"/>
                 </a:solidFill>
                 <a:latin typeface="Amiri" pitchFamily="2" charset="-78"/>
+                <a:ea typeface="Amiri" pitchFamily="2" charset="-78"/>
                 <a:cs typeface="Amiri" pitchFamily="2" charset="-78"/>
               </a:rPr>
               <a:t>أُرْسِلُ رِسَالَةً … أَوْ …</a:t>
@@ -4853,6 +4910,7 @@
                   <a:srgbClr val="1B3B6F"/>
                 </a:solidFill>
                 <a:latin typeface="Amiri" pitchFamily="2" charset="-78"/>
+                <a:ea typeface="Amiri" pitchFamily="2" charset="-78"/>
                 <a:cs typeface="Amiri" pitchFamily="2" charset="-78"/>
               </a:rPr>
               <a:t>كَيْفَ تَتَوَاصَلُ مَعَ المُعَلِّمِ إِذَا كَانَ عِنْدَكَ سُؤَالٌ؟</a:t>
@@ -4956,6 +5014,7 @@
                   <a:srgbClr val="1B3B6F"/>
                 </a:solidFill>
                 <a:latin typeface="Amiri" pitchFamily="2" charset="-78"/>
+                <a:ea typeface="Amiri" pitchFamily="2" charset="-78"/>
                 <a:cs typeface="Amiri" pitchFamily="2" charset="-78"/>
               </a:rPr>
               <a:t>فِي أَيِّ سَاعَةٍ …؟</a:t>
@@ -5032,6 +5091,7 @@
                   <a:srgbClr val="1B3B6F"/>
                 </a:solidFill>
                 <a:latin typeface="Amiri" pitchFamily="2" charset="-78"/>
+                <a:ea typeface="Amiri" pitchFamily="2" charset="-78"/>
                 <a:cs typeface="Amiri" pitchFamily="2" charset="-78"/>
               </a:rPr>
               <a:t>… فِي السَّاعَةِ الوَاحِدَةِ إِلَّا رُبْعًا.</a:t>
@@ -5135,6 +5195,7 @@
                   <a:srgbClr val="1B3B6F"/>
                 </a:solidFill>
                 <a:latin typeface="Amiri" pitchFamily="2" charset="-78"/>
+                <a:ea typeface="Amiri" pitchFamily="2" charset="-78"/>
                 <a:cs typeface="Amiri" pitchFamily="2" charset="-78"/>
               </a:rPr>
               <a:t>قَبْلَ الامْتِحَانِ دَائِمًا … لِأَنَّ …</a:t>
@@ -5211,6 +5272,7 @@
                   <a:srgbClr val="1B3B6F"/>
                 </a:solidFill>
                 <a:latin typeface="Amiri" pitchFamily="2" charset="-78"/>
+                <a:ea typeface="Amiri" pitchFamily="2" charset="-78"/>
                 <a:cs typeface="Amiri" pitchFamily="2" charset="-78"/>
               </a:rPr>
               <a:t>مَاذَا تَفْعَلُ دَائِمًا قَبْلَ الامْتِحَانِ؟</a:t>
@@ -5420,6 +5482,7 @@
                   <a:srgbClr val="D4AF37"/>
                 </a:solidFill>
                 <a:latin typeface="Amiri" pitchFamily="2" charset="-78"/>
+                <a:ea typeface="Amiri" pitchFamily="2" charset="-78"/>
                 <a:cs typeface="Amiri" pitchFamily="2" charset="-78"/>
               </a:rPr>
               <a:t>م</a:t>
@@ -5740,6 +5803,7 @@
                   <a:srgbClr val="8A6D1E"/>
                 </a:solidFill>
                 <a:latin typeface="Amiri" pitchFamily="2" charset="-78"/>
+                <a:ea typeface="Amiri" pitchFamily="2" charset="-78"/>
                 <a:cs typeface="Amiri" pitchFamily="2" charset="-78"/>
               </a:rPr>
               <a:t>الشَّاشَاتُ وَالتَّوَاصُلُ</a:t>
@@ -6020,6 +6084,7 @@
                   <a:srgbClr val="1B3B6F"/>
                 </a:solidFill>
                 <a:latin typeface="Amiri" pitchFamily="2" charset="-78"/>
+                <a:ea typeface="Amiri" pitchFamily="2" charset="-78"/>
                 <a:cs typeface="Amiri" pitchFamily="2" charset="-78"/>
               </a:rPr>
               <a:t>عِنْدَمَا أَرْجِعُ … أَمَّا …</a:t>
@@ -6096,6 +6161,7 @@
                   <a:srgbClr val="1B3B6F"/>
                 </a:solidFill>
                 <a:latin typeface="Amiri" pitchFamily="2" charset="-78"/>
+                <a:ea typeface="Amiri" pitchFamily="2" charset="-78"/>
                 <a:cs typeface="Amiri" pitchFamily="2" charset="-78"/>
               </a:rPr>
               <a:t>كَمْ سَاعَةً تَسْتَعْمِلُ الهَاتِفَ يَوْمِيًّا؟ وَفِي أَيِّ أَوْقَاتٍ؟</a:t>
@@ -6199,6 +6265,7 @@
                   <a:srgbClr val="1B3B6F"/>
                 </a:solidFill>
                 <a:latin typeface="Amiri" pitchFamily="2" charset="-78"/>
+                <a:ea typeface="Amiri" pitchFamily="2" charset="-78"/>
                 <a:cs typeface="Amiri" pitchFamily="2" charset="-78"/>
               </a:rPr>
               <a:t>كُنْتُ أَتَّصِلُ …</a:t>
@@ -6275,6 +6342,7 @@
                   <a:srgbClr val="1B3B6F"/>
                 </a:solidFill>
                 <a:latin typeface="Amiri" pitchFamily="2" charset="-78"/>
+                <a:ea typeface="Amiri" pitchFamily="2" charset="-78"/>
                 <a:cs typeface="Amiri" pitchFamily="2" charset="-78"/>
               </a:rPr>
               <a:t>كَيْفَ كُنْتَ تَتَوَاصَلُ مَعَ أَقَارِبِكَ عِنْدَمَا كُنْتَ صَغِيرًا؟</a:t>
@@ -6378,6 +6446,7 @@
                   <a:srgbClr val="1B3B6F"/>
                 </a:solidFill>
                 <a:latin typeface="Amiri" pitchFamily="2" charset="-78"/>
+                <a:ea typeface="Amiri" pitchFamily="2" charset="-78"/>
                 <a:cs typeface="Amiri" pitchFamily="2" charset="-78"/>
               </a:rPr>
               <a:t>فِي رَأْيِي … لٰكِنَّ …</a:t>
@@ -6454,6 +6523,7 @@
                   <a:srgbClr val="1B3B6F"/>
                 </a:solidFill>
                 <a:latin typeface="Amiri" pitchFamily="2" charset="-78"/>
+                <a:ea typeface="Amiri" pitchFamily="2" charset="-78"/>
                 <a:cs typeface="Amiri" pitchFamily="2" charset="-78"/>
               </a:rPr>
               <a:t>هَلْ الرَّسَائِلُ أَفْضَلُ مِنَ المُكَالَمَاتِ فِي رَأْيِكَ؟</a:t>
@@ -6557,6 +6627,7 @@
                   <a:srgbClr val="1B3B6F"/>
                 </a:solidFill>
                 <a:latin typeface="Amiri" pitchFamily="2" charset="-78"/>
+                <a:ea typeface="Amiri" pitchFamily="2" charset="-78"/>
                 <a:cs typeface="Amiri" pitchFamily="2" charset="-78"/>
               </a:rPr>
               <a:t>قَبْلَ أَنْ أَنَامَ …</a:t>
@@ -6633,6 +6704,7 @@
                   <a:srgbClr val="1B3B6F"/>
                 </a:solidFill>
                 <a:latin typeface="Amiri" pitchFamily="2" charset="-78"/>
+                <a:ea typeface="Amiri" pitchFamily="2" charset="-78"/>
                 <a:cs typeface="Amiri" pitchFamily="2" charset="-78"/>
               </a:rPr>
               <a:t>مَاذَا فَعَلْتَ أَمْسِ قَبْلَ أَنْ تَنَامَ؟</a:t>
@@ -6736,6 +6808,7 @@
                   <a:srgbClr val="1B3B6F"/>
                 </a:solidFill>
                 <a:latin typeface="Amiri" pitchFamily="2" charset="-78"/>
+                <a:ea typeface="Amiri" pitchFamily="2" charset="-78"/>
                 <a:cs typeface="Amiri" pitchFamily="2" charset="-78"/>
               </a:rPr>
               <a:t>أَنْصَحُهُ بِأَنْ …</a:t>
@@ -6812,6 +6885,7 @@
                   <a:srgbClr val="1B3B6F"/>
                 </a:solidFill>
                 <a:latin typeface="Amiri" pitchFamily="2" charset="-78"/>
+                <a:ea typeface="Amiri" pitchFamily="2" charset="-78"/>
                 <a:cs typeface="Amiri" pitchFamily="2" charset="-78"/>
               </a:rPr>
               <a:t>مَا نَصِيحَتُكَ لِطَالِبٍ يَسْتَعْمِلُ الهَاتِفَ كَثِيرًا؟</a:t>
@@ -7021,6 +7095,7 @@
                   <a:srgbClr val="D4AF37"/>
                 </a:solidFill>
                 <a:latin typeface="Amiri" pitchFamily="2" charset="-78"/>
+                <a:ea typeface="Amiri" pitchFamily="2" charset="-78"/>
                 <a:cs typeface="Amiri" pitchFamily="2" charset="-78"/>
               </a:rPr>
               <a:t>م</a:t>
@@ -7341,6 +7416,7 @@
                   <a:srgbClr val="8A6D1E"/>
                 </a:solidFill>
                 <a:latin typeface="Amiri" pitchFamily="2" charset="-78"/>
+                <a:ea typeface="Amiri" pitchFamily="2" charset="-78"/>
                 <a:cs typeface="Amiri" pitchFamily="2" charset="-78"/>
               </a:rPr>
               <a:t>وَرَقَةُ المُلَاحِظِ</a:t>
@@ -8811,6 +8887,7 @@
                   <a:srgbClr val="D4AF37"/>
                 </a:solidFill>
                 <a:latin typeface="Amiri" pitchFamily="2" charset="-78"/>
+                <a:ea typeface="Amiri" pitchFamily="2" charset="-78"/>
                 <a:cs typeface="Amiri" pitchFamily="2" charset="-78"/>
               </a:rPr>
               <a:t>م</a:t>
@@ -9131,6 +9208,7 @@
                   <a:srgbClr val="8A6D1E"/>
                 </a:solidFill>
                 <a:latin typeface="Amiri" pitchFamily="2" charset="-78"/>
+                <a:ea typeface="Amiri" pitchFamily="2" charset="-78"/>
                 <a:cs typeface="Amiri" pitchFamily="2" charset="-78"/>
               </a:rPr>
               <a:t>نَمُوذَجُ الإِجَابَةِ</a:t>
@@ -9373,6 +9451,7 @@
                   <a:srgbClr val="1B3B6F"/>
                 </a:solidFill>
                 <a:latin typeface="Amiri" pitchFamily="2" charset="-78"/>
+                <a:ea typeface="Amiri" pitchFamily="2" charset="-78"/>
                 <a:cs typeface="Amiri" pitchFamily="2" charset="-78"/>
               </a:rPr>
               <a:t>آتِي إِلَى النَّادِي مَرَّتَيْنِ فِي الأُسْبُوعِ.</a:t>
@@ -9449,6 +9528,7 @@
                   <a:srgbClr val="1B3B6F"/>
                 </a:solidFill>
                 <a:latin typeface="Amiri" pitchFamily="2" charset="-78"/>
+                <a:ea typeface="Amiri" pitchFamily="2" charset="-78"/>
                 <a:cs typeface="Amiri" pitchFamily="2" charset="-78"/>
               </a:rPr>
               <a:t>كَمْ مَرَّةً تَأْتِي إِلَى النَّادِي فِي الأُسْبُوعِ؟</a:t>
@@ -9552,6 +9632,7 @@
                   <a:srgbClr val="1B3B6F"/>
                 </a:solidFill>
                 <a:latin typeface="Amiri" pitchFamily="2" charset="-78"/>
+                <a:ea typeface="Amiri" pitchFamily="2" charset="-78"/>
                 <a:cs typeface="Amiri" pitchFamily="2" charset="-78"/>
               </a:rPr>
               <a:t>عَادَةً أَلْعَبُ كُرَةَ الطَّاوِلَةِ مَعَ أَصْدِقَائِي.</a:t>
@@ -9628,6 +9709,7 @@
                   <a:srgbClr val="1B3B6F"/>
                 </a:solidFill>
                 <a:latin typeface="Amiri" pitchFamily="2" charset="-78"/>
+                <a:ea typeface="Amiri" pitchFamily="2" charset="-78"/>
                 <a:cs typeface="Amiri" pitchFamily="2" charset="-78"/>
               </a:rPr>
               <a:t>مَاذَا تَفْعَلُ هُنَا عَادَةً؟</a:t>
@@ -9731,6 +9813,7 @@
                   <a:srgbClr val="1B3B6F"/>
                 </a:solidFill>
                 <a:latin typeface="Amiri" pitchFamily="2" charset="-78"/>
+                <a:ea typeface="Amiri" pitchFamily="2" charset="-78"/>
                 <a:cs typeface="Amiri" pitchFamily="2" charset="-78"/>
               </a:rPr>
               <a:t>لَا، لَا أَتَأَخَّرُ أَبَدًا، لِأَنِّي أَسْكُنُ قَرِيبًا.</a:t>
@@ -9807,6 +9890,7 @@
                   <a:srgbClr val="1B3B6F"/>
                 </a:solidFill>
                 <a:latin typeface="Amiri" pitchFamily="2" charset="-78"/>
+                <a:ea typeface="Amiri" pitchFamily="2" charset="-78"/>
                 <a:cs typeface="Amiri" pitchFamily="2" charset="-78"/>
               </a:rPr>
               <a:t>هَلْ تَتَأَخَّرُ أَحْيَانًا؟</a:t>
@@ -9910,6 +9994,7 @@
                   <a:srgbClr val="1B3B6F"/>
                 </a:solidFill>
                 <a:latin typeface="Amiri" pitchFamily="2" charset="-78"/>
+                <a:ea typeface="Amiri" pitchFamily="2" charset="-78"/>
                 <a:cs typeface="Amiri" pitchFamily="2" charset="-78"/>
               </a:rPr>
               <a:t>أُرْسِلُ رَسَائِلَ عَلَى الهَاتِفِ كُلَّ يَوْمٍ.</a:t>
@@ -9986,6 +10071,7 @@
                   <a:srgbClr val="1B3B6F"/>
                 </a:solidFill>
                 <a:latin typeface="Amiri" pitchFamily="2" charset="-78"/>
+                <a:ea typeface="Amiri" pitchFamily="2" charset="-78"/>
                 <a:cs typeface="Amiri" pitchFamily="2" charset="-78"/>
               </a:rPr>
               <a:t>كَيْفَ تَتَوَاصَلُ مَعَ أَصْدِقَائِكَ فِي النَّادِي؟</a:t>
@@ -10089,6 +10175,7 @@
                   <a:srgbClr val="1B3B6F"/>
                 </a:solidFill>
                 <a:latin typeface="Amiri" pitchFamily="2" charset="-78"/>
+                <a:ea typeface="Amiri" pitchFamily="2" charset="-78"/>
                 <a:cs typeface="Amiri" pitchFamily="2" charset="-78"/>
               </a:rPr>
               <a:t>بَعْدَ النَّادِي أَرْجِعُ إِلَى البَيْتِ وَأَتَنَاوَلُ العَشَاءَ.</a:t>
@@ -10165,6 +10252,7 @@
                   <a:srgbClr val="1B3B6F"/>
                 </a:solidFill>
                 <a:latin typeface="Amiri" pitchFamily="2" charset="-78"/>
+                <a:ea typeface="Amiri" pitchFamily="2" charset="-78"/>
                 <a:cs typeface="Amiri" pitchFamily="2" charset="-78"/>
               </a:rPr>
               <a:t>مَاذَا تَفْعَلُ بَعْدَ النَّادِي؟</a:t>
@@ -10374,6 +10462,7 @@
                   <a:srgbClr val="D4AF37"/>
                 </a:solidFill>
                 <a:latin typeface="Amiri" pitchFamily="2" charset="-78"/>
+                <a:ea typeface="Amiri" pitchFamily="2" charset="-78"/>
                 <a:cs typeface="Amiri" pitchFamily="2" charset="-78"/>
               </a:rPr>
               <a:t>م</a:t>
@@ -10694,6 +10783,7 @@
                   <a:srgbClr val="8A6D1E"/>
                 </a:solidFill>
                 <a:latin typeface="Amiri" pitchFamily="2" charset="-78"/>
+                <a:ea typeface="Amiri" pitchFamily="2" charset="-78"/>
                 <a:cs typeface="Amiri" pitchFamily="2" charset="-78"/>
               </a:rPr>
               <a:t>نَمُوذَجُ الإِجَابَةِ</a:t>
@@ -10936,6 +11026,7 @@
                   <a:srgbClr val="1B3B6F"/>
                 </a:solidFill>
                 <a:latin typeface="Amiri" pitchFamily="2" charset="-78"/>
+                <a:ea typeface="Amiri" pitchFamily="2" charset="-78"/>
                 <a:cs typeface="Amiri" pitchFamily="2" charset="-78"/>
               </a:rPr>
               <a:t>أَتَّصِلُ بِكِ مَرَّتَيْنِ فِي الشَّهْرِ، يَا جَدَّتِي.</a:t>
@@ -11012,6 +11103,7 @@
                   <a:srgbClr val="1B3B6F"/>
                 </a:solidFill>
                 <a:latin typeface="Amiri" pitchFamily="2" charset="-78"/>
+                <a:ea typeface="Amiri" pitchFamily="2" charset="-78"/>
                 <a:cs typeface="Amiri" pitchFamily="2" charset="-78"/>
               </a:rPr>
               <a:t>كَمْ مَرَّةً تَتَّصِلُ بِي فِي الشَّهْرِ؟</a:t>
@@ -11115,6 +11207,7 @@
                   <a:srgbClr val="1B3B6F"/>
                 </a:solidFill>
                 <a:latin typeface="Amiri" pitchFamily="2" charset="-78"/>
+                <a:ea typeface="Amiri" pitchFamily="2" charset="-78"/>
                 <a:cs typeface="Amiri" pitchFamily="2" charset="-78"/>
               </a:rPr>
               <a:t>قَبْلَ أَنْ أَذْهَبَ إِلَى المَدْرَسَةِ، أَتَنَاوَلُ الإِفْطَارَ مَعَ أُمِّي.</a:t>
@@ -11191,6 +11284,7 @@
                   <a:srgbClr val="1B3B6F"/>
                 </a:solidFill>
                 <a:latin typeface="Amiri" pitchFamily="2" charset="-78"/>
+                <a:ea typeface="Amiri" pitchFamily="2" charset="-78"/>
                 <a:cs typeface="Amiri" pitchFamily="2" charset="-78"/>
               </a:rPr>
               <a:t>مَاذَا تَفْعَلُ قَبْلَ أَنْ تَذْهَبَ إِلَى المَدْرَسَةِ؟</a:t>
@@ -11294,6 +11388,7 @@
                   <a:srgbClr val="1B3B6F"/>
                 </a:solidFill>
                 <a:latin typeface="Amiri" pitchFamily="2" charset="-78"/>
+                <a:ea typeface="Amiri" pitchFamily="2" charset="-78"/>
                 <a:cs typeface="Amiri" pitchFamily="2" charset="-78"/>
               </a:rPr>
               <a:t>عِنْدَمَا أَرْجِعُ إِلَى البَيْتِ، أَرْتَاحُ قَلِيلًا، ثُمَّ أُنْهِي وَاجِبَاتِي.</a:t>
@@ -11370,6 +11465,7 @@
                   <a:srgbClr val="1B3B6F"/>
                 </a:solidFill>
                 <a:latin typeface="Amiri" pitchFamily="2" charset="-78"/>
+                <a:ea typeface="Amiri" pitchFamily="2" charset="-78"/>
                 <a:cs typeface="Amiri" pitchFamily="2" charset="-78"/>
               </a:rPr>
               <a:t>وَمَاذَا تَفْعَلُ عِنْدَمَا تَرْجِعُ إِلَى البَيْتِ؟</a:t>
@@ -11473,6 +11569,7 @@
                   <a:srgbClr val="1B3B6F"/>
                 </a:solidFill>
                 <a:latin typeface="Amiri" pitchFamily="2" charset="-78"/>
+                <a:ea typeface="Amiri" pitchFamily="2" charset="-78"/>
                 <a:cs typeface="Amiri" pitchFamily="2" charset="-78"/>
               </a:rPr>
               <a:t>وَأَنْتِ يَا جَدَّتِي، مَاذَا تَفْعَلِينَ فِي المَسَاءِ عَادَةً؟</a:t>
@@ -11549,6 +11646,7 @@
                   <a:srgbClr val="1B3B6F"/>
                 </a:solidFill>
                 <a:latin typeface="Amiri" pitchFamily="2" charset="-78"/>
+                <a:ea typeface="Amiri" pitchFamily="2" charset="-78"/>
                 <a:cs typeface="Amiri" pitchFamily="2" charset="-78"/>
               </a:rPr>
               <a:t>… أُشَاهِدُ التِّلْفَازَ وَأَقْرَأُ القُرْآنَ.</a:t>
@@ -11652,6 +11750,7 @@
                   <a:srgbClr val="1B3B6F"/>
                 </a:solidFill>
                 <a:latin typeface="Amiri" pitchFamily="2" charset="-78"/>
+                <a:ea typeface="Amiri" pitchFamily="2" charset="-78"/>
                 <a:cs typeface="Amiri" pitchFamily="2" charset="-78"/>
               </a:rPr>
               <a:t>سَأَزُورُكِ يَوْمَ السَّبْتِ القَادِمِ بَعْدَ الظُّهْرِ، إِنْ شَاءَ اللّٰهُ.</a:t>
@@ -11728,6 +11827,7 @@
                   <a:srgbClr val="1B3B6F"/>
                 </a:solidFill>
                 <a:latin typeface="Amiri" pitchFamily="2" charset="-78"/>
+                <a:ea typeface="Amiri" pitchFamily="2" charset="-78"/>
                 <a:cs typeface="Amiri" pitchFamily="2" charset="-78"/>
               </a:rPr>
               <a:t>مَتَى سَتَزُورُنِي؟</a:t>
@@ -11937,6 +12037,7 @@
                   <a:srgbClr val="D4AF37"/>
                 </a:solidFill>
                 <a:latin typeface="Amiri" pitchFamily="2" charset="-78"/>
+                <a:ea typeface="Amiri" pitchFamily="2" charset="-78"/>
                 <a:cs typeface="Amiri" pitchFamily="2" charset="-78"/>
               </a:rPr>
               <a:t>م</a:t>
@@ -12257,6 +12358,7 @@
                   <a:srgbClr val="8A6D1E"/>
                 </a:solidFill>
                 <a:latin typeface="Amiri" pitchFamily="2" charset="-78"/>
+                <a:ea typeface="Amiri" pitchFamily="2" charset="-78"/>
                 <a:cs typeface="Amiri" pitchFamily="2" charset="-78"/>
               </a:rPr>
               <a:t>نَمُوذَجُ الإِجَابَةِ</a:t>
@@ -12499,6 +12601,7 @@
                   <a:srgbClr val="1B3B6F"/>
                 </a:solidFill>
                 <a:latin typeface="Amiri" pitchFamily="2" charset="-78"/>
+                <a:ea typeface="Amiri" pitchFamily="2" charset="-78"/>
                 <a:cs typeface="Amiri" pitchFamily="2" charset="-78"/>
               </a:rPr>
               <a:t>أَوَّلًا نَذْهَبُ إِلَى التَّسْجِيلِ، ثُمَّ تَبْدَأُ الحِصَّةُ الأُولَى، وَبَعْدَ ذٰلِكَ نَأْخُذُ اسْتِرَاحَةً قَصِيرَةً.</a:t>
@@ -12575,6 +12678,7 @@
                   <a:srgbClr val="1B3B6F"/>
                 </a:solidFill>
                 <a:latin typeface="Amiri" pitchFamily="2" charset="-78"/>
+                <a:ea typeface="Amiri" pitchFamily="2" charset="-78"/>
                 <a:cs typeface="Amiri" pitchFamily="2" charset="-78"/>
               </a:rPr>
               <a:t>مَاذَا يَحْدُثُ فِي الصَّبَاحِ عِنْدَمَا نَصِلُ؟</a:t>
@@ -12678,6 +12782,7 @@
                   <a:srgbClr val="1B3B6F"/>
                 </a:solidFill>
                 <a:latin typeface="Amiri" pitchFamily="2" charset="-78"/>
+                <a:ea typeface="Amiri" pitchFamily="2" charset="-78"/>
                 <a:cs typeface="Amiri" pitchFamily="2" charset="-78"/>
               </a:rPr>
               <a:t>عِنْدَنَا وَاجِبٌ ثَلَاثَ مَرَّاتٍ فِي الأُسْبُوعِ عَادَةً، وَأَحْيَانًا امْتِحَانٌ قَصِيرٌ.</a:t>
@@ -12754,6 +12859,7 @@
                   <a:srgbClr val="1B3B6F"/>
                 </a:solidFill>
                 <a:latin typeface="Amiri" pitchFamily="2" charset="-78"/>
+                <a:ea typeface="Amiri" pitchFamily="2" charset="-78"/>
                 <a:cs typeface="Amiri" pitchFamily="2" charset="-78"/>
               </a:rPr>
               <a:t>كَمْ مَرَّةً عِنْدَنَا وَاجِبٌ فِي العَرَبِيَّةِ؟</a:t>
@@ -12857,6 +12963,7 @@
                   <a:srgbClr val="1B3B6F"/>
                 </a:solidFill>
                 <a:latin typeface="Amiri" pitchFamily="2" charset="-78"/>
+                <a:ea typeface="Amiri" pitchFamily="2" charset="-78"/>
                 <a:cs typeface="Amiri" pitchFamily="2" charset="-78"/>
               </a:rPr>
               <a:t>أُرْسِلُ لَهُ رِسَالَةً عَلَى المَنَصَّةِ، أَوْ أَسْأَلُهُ بَعْدَ الحِصَّةِ.</a:t>
@@ -12933,6 +13040,7 @@
                   <a:srgbClr val="1B3B6F"/>
                 </a:solidFill>
                 <a:latin typeface="Amiri" pitchFamily="2" charset="-78"/>
+                <a:ea typeface="Amiri" pitchFamily="2" charset="-78"/>
                 <a:cs typeface="Amiri" pitchFamily="2" charset="-78"/>
               </a:rPr>
               <a:t>كَيْفَ تَتَوَاصَلُ مَعَ المُعَلِّمِ إِذَا كَانَ عِنْدَكَ سُؤَالٌ؟</a:t>
@@ -13036,6 +13144,7 @@
                   <a:srgbClr val="1B3B6F"/>
                 </a:solidFill>
                 <a:latin typeface="Amiri" pitchFamily="2" charset="-78"/>
+                <a:ea typeface="Amiri" pitchFamily="2" charset="-78"/>
                 <a:cs typeface="Amiri" pitchFamily="2" charset="-78"/>
               </a:rPr>
               <a:t>فِي أَيِّ سَاعَةٍ نَتَنَاوَلُ الغَدَاءَ؟</a:t>
@@ -13112,6 +13221,7 @@
                   <a:srgbClr val="1B3B6F"/>
                 </a:solidFill>
                 <a:latin typeface="Amiri" pitchFamily="2" charset="-78"/>
+                <a:ea typeface="Amiri" pitchFamily="2" charset="-78"/>
                 <a:cs typeface="Amiri" pitchFamily="2" charset="-78"/>
               </a:rPr>
               <a:t>… فِي السَّاعَةِ الوَاحِدَةِ إِلَّا رُبْعًا.</a:t>
@@ -13215,6 +13325,7 @@
                   <a:srgbClr val="1B3B6F"/>
                 </a:solidFill>
                 <a:latin typeface="Amiri" pitchFamily="2" charset="-78"/>
+                <a:ea typeface="Amiri" pitchFamily="2" charset="-78"/>
                 <a:cs typeface="Amiri" pitchFamily="2" charset="-78"/>
               </a:rPr>
               <a:t>قَبْلَ الامْتِحَانِ دَائِمًا أُرَاجِعُ مُلَاحَظَاتِي وَأَنَامُ مُبَكِّرًا، لِأَنَّ النَّوْمَ يُسَاعِدُنِي عَلَى التَّرْكِيزِ.</a:t>
@@ -13291,6 +13402,7 @@
                   <a:srgbClr val="1B3B6F"/>
                 </a:solidFill>
                 <a:latin typeface="Amiri" pitchFamily="2" charset="-78"/>
+                <a:ea typeface="Amiri" pitchFamily="2" charset="-78"/>
                 <a:cs typeface="Amiri" pitchFamily="2" charset="-78"/>
               </a:rPr>
               <a:t>مَاذَا تَفْعَلُ دَائِمًا قَبْلَ الامْتِحَانِ؟</a:t>
@@ -13500,6 +13612,7 @@
                   <a:srgbClr val="D4AF37"/>
                 </a:solidFill>
                 <a:latin typeface="Amiri" pitchFamily="2" charset="-78"/>
+                <a:ea typeface="Amiri" pitchFamily="2" charset="-78"/>
                 <a:cs typeface="Amiri" pitchFamily="2" charset="-78"/>
               </a:rPr>
               <a:t>م</a:t>
@@ -13820,6 +13933,7 @@
                   <a:srgbClr val="8A6D1E"/>
                 </a:solidFill>
                 <a:latin typeface="Amiri" pitchFamily="2" charset="-78"/>
+                <a:ea typeface="Amiri" pitchFamily="2" charset="-78"/>
                 <a:cs typeface="Amiri" pitchFamily="2" charset="-78"/>
               </a:rPr>
               <a:t>نَمُوذَجُ الإِجَابَةِ</a:t>
@@ -14062,6 +14176,7 @@
                   <a:srgbClr val="1B3B6F"/>
                 </a:solidFill>
                 <a:latin typeface="Amiri" pitchFamily="2" charset="-78"/>
+                <a:ea typeface="Amiri" pitchFamily="2" charset="-78"/>
                 <a:cs typeface="Amiri" pitchFamily="2" charset="-78"/>
               </a:rPr>
               <a:t>أَسْتَعْمِلُهُ سَاعَتَيْنِ تَقْرِيبًا؛ عِنْدَمَا أَرْجِعُ مِنَ المَدْرَسَةِ أُرْسِلُ رَسَائِلَ لِأَصْدِقَائِي، أَمَّا فِي اللَّيْلِ فَأُطْفِئُهُ.</a:t>
@@ -14138,6 +14253,7 @@
                   <a:srgbClr val="1B3B6F"/>
                 </a:solidFill>
                 <a:latin typeface="Amiri" pitchFamily="2" charset="-78"/>
+                <a:ea typeface="Amiri" pitchFamily="2" charset="-78"/>
                 <a:cs typeface="Amiri" pitchFamily="2" charset="-78"/>
               </a:rPr>
               <a:t>كَمْ سَاعَةً تَسْتَعْمِلُ الهَاتِفَ يَوْمِيًّا؟ وَفِي أَيِّ أَوْقَاتٍ؟</a:t>
@@ -14241,6 +14357,7 @@
                   <a:srgbClr val="1B3B6F"/>
                 </a:solidFill>
                 <a:latin typeface="Amiri" pitchFamily="2" charset="-78"/>
+                <a:ea typeface="Amiri" pitchFamily="2" charset="-78"/>
                 <a:cs typeface="Amiri" pitchFamily="2" charset="-78"/>
               </a:rPr>
               <a:t>عِنْدَمَا كُنْتُ صَغِيرًا، كُنْتُ أَتَّصِلُ بِجَدِّي بِالهَاتِفِ الأَرْضِيِّ مَرَّةً فِي الأُسْبُوعِ فَقَطْ.</a:t>
@@ -14317,6 +14434,7 @@
                   <a:srgbClr val="1B3B6F"/>
                 </a:solidFill>
                 <a:latin typeface="Amiri" pitchFamily="2" charset="-78"/>
+                <a:ea typeface="Amiri" pitchFamily="2" charset="-78"/>
                 <a:cs typeface="Amiri" pitchFamily="2" charset="-78"/>
               </a:rPr>
               <a:t>كَيْفَ كُنْتَ تَتَوَاصَلُ مَعَ أَقَارِبِكَ عِنْدَمَا كُنْتَ صَغِيرًا؟</a:t>
@@ -14420,6 +14538,7 @@
                   <a:srgbClr val="1B3B6F"/>
                 </a:solidFill>
                 <a:latin typeface="Amiri" pitchFamily="2" charset="-78"/>
+                <a:ea typeface="Amiri" pitchFamily="2" charset="-78"/>
                 <a:cs typeface="Amiri" pitchFamily="2" charset="-78"/>
               </a:rPr>
               <a:t>فِي رَأْيِي الرَّسَائِلُ أَسْرَعُ، لٰكِنَّ المُكَالَمَاتِ أَدْفَأُ، لِأَنَّنَا نَسْمَعُ الصَّوْتَ وَنَفْهَمُ المَشَاعِرَ.</a:t>
@@ -14496,6 +14615,7 @@
                   <a:srgbClr val="1B3B6F"/>
                 </a:solidFill>
                 <a:latin typeface="Amiri" pitchFamily="2" charset="-78"/>
+                <a:ea typeface="Amiri" pitchFamily="2" charset="-78"/>
                 <a:cs typeface="Amiri" pitchFamily="2" charset="-78"/>
               </a:rPr>
               <a:t>هَلْ الرَّسَائِلُ أَفْضَلُ مِنَ المُكَالَمَاتِ فِي رَأْيِكَ؟</a:t>
@@ -14599,6 +14719,7 @@
                   <a:srgbClr val="1B3B6F"/>
                 </a:solidFill>
                 <a:latin typeface="Amiri" pitchFamily="2" charset="-78"/>
+                <a:ea typeface="Amiri" pitchFamily="2" charset="-78"/>
                 <a:cs typeface="Amiri" pitchFamily="2" charset="-78"/>
               </a:rPr>
               <a:t>أَمْسِ، قَبْلَ أَنْ أَنَامَ، قَرَأْتُ كِتَابًا نِصْفَ سَاعَةٍ، وَلَمْ أَسْتَعْمِلِ الهَاتِفَ أَبَدًا.</a:t>
@@ -14675,6 +14796,7 @@
                   <a:srgbClr val="1B3B6F"/>
                 </a:solidFill>
                 <a:latin typeface="Amiri" pitchFamily="2" charset="-78"/>
+                <a:ea typeface="Amiri" pitchFamily="2" charset="-78"/>
                 <a:cs typeface="Amiri" pitchFamily="2" charset="-78"/>
               </a:rPr>
               <a:t>مَاذَا فَعَلْتَ أَمْسِ قَبْلَ أَنْ تَنَامَ؟</a:t>
@@ -14778,6 +14900,7 @@
                   <a:srgbClr val="1B3B6F"/>
                 </a:solidFill>
                 <a:latin typeface="Amiri" pitchFamily="2" charset="-78"/>
+                <a:ea typeface="Amiri" pitchFamily="2" charset="-78"/>
                 <a:cs typeface="Amiri" pitchFamily="2" charset="-78"/>
               </a:rPr>
               <a:t>أَنْصَحُهُ بِأَنْ يُطْفِئَ الهَاتِفَ سَاعَةً قَبْلَ النَّوْمِ، وَأَنْ يَتَّصِلَ بِأَصْدِقَائِهِ بَدَلًا مِنَ الرَّسَائِلِ الكَثِيرَةِ.</a:t>
@@ -14854,6 +14977,7 @@
                   <a:srgbClr val="1B3B6F"/>
                 </a:solidFill>
                 <a:latin typeface="Amiri" pitchFamily="2" charset="-78"/>
+                <a:ea typeface="Amiri" pitchFamily="2" charset="-78"/>
                 <a:cs typeface="Amiri" pitchFamily="2" charset="-78"/>
               </a:rPr>
               <a:t>مَا نَصِيحَتُكَ لِطَالِبٍ يَسْتَعْمِلُ الهَاتِفَ كَثِيرًا؟</a:t>
@@ -15063,6 +15187,7 @@
                   <a:srgbClr val="D4AF37"/>
                 </a:solidFill>
                 <a:latin typeface="Amiri" pitchFamily="2" charset="-78"/>
+                <a:ea typeface="Amiri" pitchFamily="2" charset="-78"/>
                 <a:cs typeface="Amiri" pitchFamily="2" charset="-78"/>
               </a:rPr>
               <a:t>م</a:t>
@@ -15383,6 +15508,7 @@
                   <a:srgbClr val="8A6D1E"/>
                 </a:solidFill>
                 <a:latin typeface="Amiri" pitchFamily="2" charset="-78"/>
+                <a:ea typeface="Amiri" pitchFamily="2" charset="-78"/>
                 <a:cs typeface="Amiri" pitchFamily="2" charset="-78"/>
               </a:rPr>
               <a:t>كَمْ مَرَّةً؟</a:t>
@@ -15663,6 +15789,7 @@
                   <a:srgbClr val="1B3B6F"/>
                 </a:solidFill>
                 <a:latin typeface="Amiri" pitchFamily="2" charset="-78"/>
+                <a:ea typeface="Amiri" pitchFamily="2" charset="-78"/>
                 <a:cs typeface="Amiri" pitchFamily="2" charset="-78"/>
               </a:rPr>
               <a:t>أُمَارِسُ الرِّيَاضَةَ …</a:t>
@@ -15739,6 +15866,7 @@
                   <a:srgbClr val="1B3B6F"/>
                 </a:solidFill>
                 <a:latin typeface="Amiri" pitchFamily="2" charset="-78"/>
+                <a:ea typeface="Amiri" pitchFamily="2" charset="-78"/>
                 <a:cs typeface="Amiri" pitchFamily="2" charset="-78"/>
               </a:rPr>
               <a:t>كَمْ مَرَّةً تُمَارِسُ الرِّيَاضَةَ؟</a:t>
@@ -15907,6 +16035,7 @@
                   <a:srgbClr val="1B3B6F"/>
                 </a:solidFill>
                 <a:latin typeface="Amiri" pitchFamily="2" charset="-78"/>
+                <a:ea typeface="Amiri" pitchFamily="2" charset="-78"/>
                 <a:cs typeface="Amiri" pitchFamily="2" charset="-78"/>
               </a:rPr>
               <a:t>نَعَمْ، أَقْرَأُ … أَحْيَانًا</a:t>
@@ -15983,6 +16112,7 @@
                   <a:srgbClr val="1B3B6F"/>
                 </a:solidFill>
                 <a:latin typeface="Amiri" pitchFamily="2" charset="-78"/>
+                <a:ea typeface="Amiri" pitchFamily="2" charset="-78"/>
                 <a:cs typeface="Amiri" pitchFamily="2" charset="-78"/>
               </a:rPr>
               <a:t>هَلْ تَقْرَأُ الكُتُبَ؟</a:t>
@@ -16151,6 +16281,7 @@
                   <a:srgbClr val="1B3B6F"/>
                 </a:solidFill>
                 <a:latin typeface="Amiri" pitchFamily="2" charset="-78"/>
+                <a:ea typeface="Amiri" pitchFamily="2" charset="-78"/>
                 <a:cs typeface="Amiri" pitchFamily="2" charset="-78"/>
               </a:rPr>
               <a:t>أُرْسِلُ … / أَتَّصِلُ …</a:t>
@@ -16227,6 +16358,7 @@
                   <a:srgbClr val="1B3B6F"/>
                 </a:solidFill>
                 <a:latin typeface="Amiri" pitchFamily="2" charset="-78"/>
+                <a:ea typeface="Amiri" pitchFamily="2" charset="-78"/>
                 <a:cs typeface="Amiri" pitchFamily="2" charset="-78"/>
               </a:rPr>
               <a:t>كَيْفَ تَتَوَاصَلُ مَعَ أَصْدِقَائِكَ؟</a:t>
@@ -16395,6 +16527,7 @@
                   <a:srgbClr val="1B3B6F"/>
                 </a:solidFill>
                 <a:latin typeface="Amiri" pitchFamily="2" charset="-78"/>
+                <a:ea typeface="Amiri" pitchFamily="2" charset="-78"/>
                 <a:cs typeface="Amiri" pitchFamily="2" charset="-78"/>
               </a:rPr>
               <a:t>قَبْلَ النَّوْمِ …</a:t>
@@ -16471,6 +16604,7 @@
                   <a:srgbClr val="1B3B6F"/>
                 </a:solidFill>
                 <a:latin typeface="Amiri" pitchFamily="2" charset="-78"/>
+                <a:ea typeface="Amiri" pitchFamily="2" charset="-78"/>
                 <a:cs typeface="Amiri" pitchFamily="2" charset="-78"/>
               </a:rPr>
               <a:t>مَاذَا تَفْعَلُ قَبْلَ النَّوْمِ؟</a:t>
@@ -16639,6 +16773,7 @@
                   <a:srgbClr val="1B3B6F"/>
                 </a:solidFill>
                 <a:latin typeface="Amiri" pitchFamily="2" charset="-78"/>
+                <a:ea typeface="Amiri" pitchFamily="2" charset="-78"/>
                 <a:cs typeface="Amiri" pitchFamily="2" charset="-78"/>
               </a:rPr>
               <a:t>لَا، … أَبَدًا / نَادِرًا</a:t>
@@ -16715,6 +16850,7 @@
                   <a:srgbClr val="1B3B6F"/>
                 </a:solidFill>
                 <a:latin typeface="Amiri" pitchFamily="2" charset="-78"/>
+                <a:ea typeface="Amiri" pitchFamily="2" charset="-78"/>
                 <a:cs typeface="Amiri" pitchFamily="2" charset="-78"/>
               </a:rPr>
               <a:t>هَلْ تَتَأَخَّرُ عَنِ المَدْرَسَةِ؟</a:t>
@@ -16989,6 +17125,7 @@
                   <a:srgbClr val="D4AF37"/>
                 </a:solidFill>
                 <a:latin typeface="Amiri" pitchFamily="2" charset="-78"/>
+                <a:ea typeface="Amiri" pitchFamily="2" charset="-78"/>
                 <a:cs typeface="Amiri" pitchFamily="2" charset="-78"/>
               </a:rPr>
               <a:t>م</a:t>
@@ -17309,6 +17446,7 @@
                   <a:srgbClr val="8A6D1E"/>
                 </a:solidFill>
                 <a:latin typeface="Amiri" pitchFamily="2" charset="-78"/>
+                <a:ea typeface="Amiri" pitchFamily="2" charset="-78"/>
                 <a:cs typeface="Amiri" pitchFamily="2" charset="-78"/>
               </a:rPr>
               <a:t>التَّرْتِيبُ وَالتَّوَاصُلُ</a:t>
@@ -17589,6 +17727,7 @@
                   <a:srgbClr val="1B3B6F"/>
                 </a:solidFill>
                 <a:latin typeface="Amiri" pitchFamily="2" charset="-78"/>
+                <a:ea typeface="Amiri" pitchFamily="2" charset="-78"/>
                 <a:cs typeface="Amiri" pitchFamily="2" charset="-78"/>
               </a:rPr>
               <a:t>عِنْدَمَا أَرْجِعُ … ثُمَّ …</a:t>
@@ -17665,6 +17804,7 @@
                   <a:srgbClr val="1B3B6F"/>
                 </a:solidFill>
                 <a:latin typeface="Amiri" pitchFamily="2" charset="-78"/>
+                <a:ea typeface="Amiri" pitchFamily="2" charset="-78"/>
                 <a:cs typeface="Amiri" pitchFamily="2" charset="-78"/>
               </a:rPr>
               <a:t>صِفْ مَاذَا تَفْعَلُ بَعْدَ المَدْرَسَةِ بِالتَّرْتِيبِ.</a:t>
@@ -17768,6 +17908,7 @@
                   <a:srgbClr val="1B3B6F"/>
                 </a:solidFill>
                 <a:latin typeface="Amiri" pitchFamily="2" charset="-78"/>
+                <a:ea typeface="Amiri" pitchFamily="2" charset="-78"/>
                 <a:cs typeface="Amiri" pitchFamily="2" charset="-78"/>
               </a:rPr>
               <a:t>أَتَّصِلُ بِخَالَتِي … لِأَنَّ …</a:t>
@@ -17844,6 +17985,7 @@
                   <a:srgbClr val="1B3B6F"/>
                 </a:solidFill>
                 <a:latin typeface="Amiri" pitchFamily="2" charset="-78"/>
+                <a:ea typeface="Amiri" pitchFamily="2" charset="-78"/>
                 <a:cs typeface="Amiri" pitchFamily="2" charset="-78"/>
               </a:rPr>
               <a:t>كَمْ مَرَّةً تَتَّصِلُ بِأَقَارِبِكَ؟ لِمَاذَا؟</a:t>
@@ -17947,6 +18089,7 @@
                   <a:srgbClr val="1B3B6F"/>
                 </a:solidFill>
                 <a:latin typeface="Amiri" pitchFamily="2" charset="-78"/>
+                <a:ea typeface="Amiri" pitchFamily="2" charset="-78"/>
                 <a:cs typeface="Amiri" pitchFamily="2" charset="-78"/>
               </a:rPr>
               <a:t>قَبْلَ أَنْ أَذْهَبَ …</a:t>
@@ -18023,6 +18166,7 @@
                   <a:srgbClr val="1B3B6F"/>
                 </a:solidFill>
                 <a:latin typeface="Amiri" pitchFamily="2" charset="-78"/>
+                <a:ea typeface="Amiri" pitchFamily="2" charset="-78"/>
                 <a:cs typeface="Amiri" pitchFamily="2" charset="-78"/>
               </a:rPr>
               <a:t>مَاذَا تَفْعَلُ عَادَةً قَبْلَ أَنْ تَذْهَبَ إِلَى المَدْرَسَةِ؟</a:t>
@@ -18126,6 +18270,7 @@
                   <a:srgbClr val="1B3B6F"/>
                 </a:solidFill>
                 <a:latin typeface="Amiri" pitchFamily="2" charset="-78"/>
+                <a:ea typeface="Amiri" pitchFamily="2" charset="-78"/>
                 <a:cs typeface="Amiri" pitchFamily="2" charset="-78"/>
               </a:rPr>
               <a:t>لَا … أَبَدًا، لِأَنَّ …</a:t>
@@ -18202,6 +18347,7 @@
                   <a:srgbClr val="1B3B6F"/>
                 </a:solidFill>
                 <a:latin typeface="Amiri" pitchFamily="2" charset="-78"/>
+                <a:ea typeface="Amiri" pitchFamily="2" charset="-78"/>
                 <a:cs typeface="Amiri" pitchFamily="2" charset="-78"/>
               </a:rPr>
               <a:t>مَا الشَّيْءُ الَّذِي لَا تَفْعَلُهُ أَبَدًا؟</a:t>
@@ -18305,6 +18451,7 @@
                   <a:srgbClr val="1B3B6F"/>
                 </a:solidFill>
                 <a:latin typeface="Amiri" pitchFamily="2" charset="-78"/>
+                <a:ea typeface="Amiri" pitchFamily="2" charset="-78"/>
                 <a:cs typeface="Amiri" pitchFamily="2" charset="-78"/>
               </a:rPr>
               <a:t>بَعْدَ أَنْ رَجَعْتُ …</a:t>
@@ -18381,6 +18528,7 @@
                   <a:srgbClr val="1B3B6F"/>
                 </a:solidFill>
                 <a:latin typeface="Amiri" pitchFamily="2" charset="-78"/>
+                <a:ea typeface="Amiri" pitchFamily="2" charset="-78"/>
                 <a:cs typeface="Amiri" pitchFamily="2" charset="-78"/>
               </a:rPr>
               <a:t>مَاذَا فَعَلْتَ أَمْسِ بَعْدَ أَنْ رَجَعْتَ إِلَى البَيْتِ؟</a:t>
@@ -18590,6 +18738,7 @@
                   <a:srgbClr val="D4AF37"/>
                 </a:solidFill>
                 <a:latin typeface="Amiri" pitchFamily="2" charset="-78"/>
+                <a:ea typeface="Amiri" pitchFamily="2" charset="-78"/>
                 <a:cs typeface="Amiri" pitchFamily="2" charset="-78"/>
               </a:rPr>
               <a:t>م</a:t>
@@ -18910,6 +19059,7 @@
                   <a:srgbClr val="8A6D1E"/>
                 </a:solidFill>
                 <a:latin typeface="Amiri" pitchFamily="2" charset="-78"/>
+                <a:ea typeface="Amiri" pitchFamily="2" charset="-78"/>
                 <a:cs typeface="Amiri" pitchFamily="2" charset="-78"/>
               </a:rPr>
               <a:t>التَّوَاصُلُ اليَوْمَ</a:t>
@@ -19190,6 +19340,7 @@
                   <a:srgbClr val="1B3B6F"/>
                 </a:solidFill>
                 <a:latin typeface="Amiri" pitchFamily="2" charset="-78"/>
+                <a:ea typeface="Amiri" pitchFamily="2" charset="-78"/>
                 <a:cs typeface="Amiri" pitchFamily="2" charset="-78"/>
               </a:rPr>
               <a:t>فِي المَاضِي كَانَ … أَمَّا اليَوْمَ فَنَتَوَاصَلُ …</a:t>
@@ -19266,6 +19417,7 @@
                   <a:srgbClr val="1B3B6F"/>
                 </a:solidFill>
                 <a:latin typeface="Amiri" pitchFamily="2" charset="-78"/>
+                <a:ea typeface="Amiri" pitchFamily="2" charset="-78"/>
                 <a:cs typeface="Amiri" pitchFamily="2" charset="-78"/>
               </a:rPr>
               <a:t>كَيْفَ تَغَيَّرَ التَّوَاصُلُ بَيْنَ النَّاسِ فِي رَأْيِكَ؟</a:t>
@@ -19369,6 +19521,7 @@
                   <a:srgbClr val="1B3B6F"/>
                 </a:solidFill>
                 <a:latin typeface="Amiri" pitchFamily="2" charset="-78"/>
+                <a:ea typeface="Amiri" pitchFamily="2" charset="-78"/>
                 <a:cs typeface="Amiri" pitchFamily="2" charset="-78"/>
               </a:rPr>
               <a:t>أَعْتَقِدُ أَنَّ … لِأَنَّ …</a:t>
@@ -19445,6 +19598,7 @@
                   <a:srgbClr val="1B3B6F"/>
                 </a:solidFill>
                 <a:latin typeface="Amiri" pitchFamily="2" charset="-78"/>
+                <a:ea typeface="Amiri" pitchFamily="2" charset="-78"/>
                 <a:cs typeface="Amiri" pitchFamily="2" charset="-78"/>
               </a:rPr>
               <a:t>هَلْ يَقْضِي الشَّبَابُ وَقْتًا طَوِيلًا عَلَى الشَّاشَاتِ؟</a:t>
@@ -19548,6 +19702,7 @@
                   <a:srgbClr val="1B3B6F"/>
                 </a:solidFill>
                 <a:latin typeface="Amiri" pitchFamily="2" charset="-78"/>
+                <a:ea typeface="Amiri" pitchFamily="2" charset="-78"/>
                 <a:cs typeface="Amiri" pitchFamily="2" charset="-78"/>
               </a:rPr>
               <a:t>دَائِمًا أَكْتُبُ … قَبْلَ أَنْ …</a:t>
@@ -19624,6 +19779,7 @@
                   <a:srgbClr val="1B3B6F"/>
                 </a:solidFill>
                 <a:latin typeface="Amiri" pitchFamily="2" charset="-78"/>
+                <a:ea typeface="Amiri" pitchFamily="2" charset="-78"/>
                 <a:cs typeface="Amiri" pitchFamily="2" charset="-78"/>
               </a:rPr>
               <a:t>مَا الَّذِي تَفْعَلُهُ دَائِمًا لِتُنَظِّمَ يَوْمَكَ؟</a:t>
@@ -19727,6 +19883,7 @@
                   <a:srgbClr val="1B3B6F"/>
                 </a:solidFill>
                 <a:latin typeface="Amiri" pitchFamily="2" charset="-78"/>
+                <a:ea typeface="Amiri" pitchFamily="2" charset="-78"/>
                 <a:cs typeface="Amiri" pitchFamily="2" charset="-78"/>
               </a:rPr>
               <a:t>فِي العِيدِ اتَّصَلْتُ بِجَدِّي …</a:t>
@@ -19803,6 +19960,7 @@
                   <a:srgbClr val="1B3B6F"/>
                 </a:solidFill>
                 <a:latin typeface="Amiri" pitchFamily="2" charset="-78"/>
+                <a:ea typeface="Amiri" pitchFamily="2" charset="-78"/>
                 <a:cs typeface="Amiri" pitchFamily="2" charset="-78"/>
               </a:rPr>
               <a:t>صِفْ مُكَالَمَةً مُهِمَّةً أَجْرَيْتَهَا.</a:t>
@@ -19906,6 +20064,7 @@
                   <a:srgbClr val="1B3B6F"/>
                 </a:solidFill>
                 <a:latin typeface="Amiri" pitchFamily="2" charset="-78"/>
+                <a:ea typeface="Amiri" pitchFamily="2" charset="-78"/>
                 <a:cs typeface="Amiri" pitchFamily="2" charset="-78"/>
               </a:rPr>
               <a:t>لَوْ لَمْ يَكُنْ هُنَاكَ هَاتِفٌ، لَكَتَبْتُ …</a:t>
@@ -19982,6 +20141,7 @@
                   <a:srgbClr val="1B3B6F"/>
                 </a:solidFill>
                 <a:latin typeface="Amiri" pitchFamily="2" charset="-78"/>
+                <a:ea typeface="Amiri" pitchFamily="2" charset="-78"/>
                 <a:cs typeface="Amiri" pitchFamily="2" charset="-78"/>
               </a:rPr>
               <a:t>لَوْ لَمْ يَكُنْ هُنَاكَ هَاتِفٌ، كَيْفَ تَتَوَاصَلُ؟</a:t>
@@ -20191,6 +20351,7 @@
                   <a:srgbClr val="D4AF37"/>
                 </a:solidFill>
                 <a:latin typeface="Amiri" pitchFamily="2" charset="-78"/>
+                <a:ea typeface="Amiri" pitchFamily="2" charset="-78"/>
                 <a:cs typeface="Amiri" pitchFamily="2" charset="-78"/>
               </a:rPr>
               <a:t>م</a:t>
@@ -20511,6 +20672,7 @@
                   <a:srgbClr val="8A6D1E"/>
                 </a:solidFill>
                 <a:latin typeface="Amiri" pitchFamily="2" charset="-78"/>
+                <a:ea typeface="Amiri" pitchFamily="2" charset="-78"/>
                 <a:cs typeface="Amiri" pitchFamily="2" charset="-78"/>
               </a:rPr>
               <a:t>آدَابُ الصَّفِّ</a:t>
@@ -22042,6 +22204,7 @@
                   <a:srgbClr val="D4AF37"/>
                 </a:solidFill>
                 <a:latin typeface="Amiri" pitchFamily="2" charset="-78"/>
+                <a:ea typeface="Amiri" pitchFamily="2" charset="-78"/>
                 <a:cs typeface="Amiri" pitchFamily="2" charset="-78"/>
               </a:rPr>
               <a:t>م</a:t>
@@ -22362,6 +22525,7 @@
                   <a:srgbClr val="8A6D1E"/>
                 </a:solidFill>
                 <a:latin typeface="Amiri" pitchFamily="2" charset="-78"/>
+                <a:ea typeface="Amiri" pitchFamily="2" charset="-78"/>
                 <a:cs typeface="Amiri" pitchFamily="2" charset="-78"/>
               </a:rPr>
               <a:t>نَمُوذَجُ الإِجَابَةِ</a:t>
@@ -22604,6 +22768,7 @@
                   <a:srgbClr val="1B3B6F"/>
                 </a:solidFill>
                 <a:latin typeface="Amiri" pitchFamily="2" charset="-78"/>
+                <a:ea typeface="Amiri" pitchFamily="2" charset="-78"/>
                 <a:cs typeface="Amiri" pitchFamily="2" charset="-78"/>
               </a:rPr>
               <a:t>أُمَارِسُ الرِّيَاضَةَ ثَلَاثَ مَرَّاتٍ فِي الأُسْبُوعِ.</a:t>
@@ -22680,6 +22845,7 @@
                   <a:srgbClr val="1B3B6F"/>
                 </a:solidFill>
                 <a:latin typeface="Amiri" pitchFamily="2" charset="-78"/>
+                <a:ea typeface="Amiri" pitchFamily="2" charset="-78"/>
                 <a:cs typeface="Amiri" pitchFamily="2" charset="-78"/>
               </a:rPr>
               <a:t>كَمْ مَرَّةً تُمَارِسُ الرِّيَاضَةَ؟</a:t>
@@ -22783,6 +22949,7 @@
                   <a:srgbClr val="1B3B6F"/>
                 </a:solidFill>
                 <a:latin typeface="Amiri" pitchFamily="2" charset="-78"/>
+                <a:ea typeface="Amiri" pitchFamily="2" charset="-78"/>
                 <a:cs typeface="Amiri" pitchFamily="2" charset="-78"/>
               </a:rPr>
               <a:t>نَعَمْ، أَقْرَأُ الكُتُبَ أَحْيَانًا فِي المَسَاءِ.</a:t>
@@ -22859,6 +23026,7 @@
                   <a:srgbClr val="1B3B6F"/>
                 </a:solidFill>
                 <a:latin typeface="Amiri" pitchFamily="2" charset="-78"/>
+                <a:ea typeface="Amiri" pitchFamily="2" charset="-78"/>
                 <a:cs typeface="Amiri" pitchFamily="2" charset="-78"/>
               </a:rPr>
               <a:t>هَلْ تَقْرَأُ الكُتُبَ؟</a:t>
@@ -22962,6 +23130,7 @@
                   <a:srgbClr val="1B3B6F"/>
                 </a:solidFill>
                 <a:latin typeface="Amiri" pitchFamily="2" charset="-78"/>
+                <a:ea typeface="Amiri" pitchFamily="2" charset="-78"/>
                 <a:cs typeface="Amiri" pitchFamily="2" charset="-78"/>
               </a:rPr>
               <a:t>أُرْسِلُ رَسَائِلَ لِأَصْدِقَائِي كُلَّ يَوْمٍ.</a:t>
@@ -23038,6 +23207,7 @@
                   <a:srgbClr val="1B3B6F"/>
                 </a:solidFill>
                 <a:latin typeface="Amiri" pitchFamily="2" charset="-78"/>
+                <a:ea typeface="Amiri" pitchFamily="2" charset="-78"/>
                 <a:cs typeface="Amiri" pitchFamily="2" charset="-78"/>
               </a:rPr>
               <a:t>كَيْفَ تَتَوَاصَلُ مَعَ أَصْدِقَائِكَ؟</a:t>
@@ -23141,6 +23311,7 @@
                   <a:srgbClr val="1B3B6F"/>
                 </a:solidFill>
                 <a:latin typeface="Amiri" pitchFamily="2" charset="-78"/>
+                <a:ea typeface="Amiri" pitchFamily="2" charset="-78"/>
                 <a:cs typeface="Amiri" pitchFamily="2" charset="-78"/>
               </a:rPr>
               <a:t>قَبْلَ النَّوْمِ أُنَظِّفُ أَسْنَانِي وَأَقْرَأُ قَلِيلًا.</a:t>
@@ -23217,6 +23388,7 @@
                   <a:srgbClr val="1B3B6F"/>
                 </a:solidFill>
                 <a:latin typeface="Amiri" pitchFamily="2" charset="-78"/>
+                <a:ea typeface="Amiri" pitchFamily="2" charset="-78"/>
                 <a:cs typeface="Amiri" pitchFamily="2" charset="-78"/>
               </a:rPr>
               <a:t>مَاذَا تَفْعَلُ قَبْلَ النَّوْمِ؟</a:t>
@@ -23320,6 +23492,7 @@
                   <a:srgbClr val="1B3B6F"/>
                 </a:solidFill>
                 <a:latin typeface="Amiri" pitchFamily="2" charset="-78"/>
+                <a:ea typeface="Amiri" pitchFamily="2" charset="-78"/>
                 <a:cs typeface="Amiri" pitchFamily="2" charset="-78"/>
               </a:rPr>
               <a:t>نَادِرًا مَا أَتَأَخَّرُ عَنِ المَدْرَسَةِ.</a:t>
@@ -23396,6 +23569,7 @@
                   <a:srgbClr val="1B3B6F"/>
                 </a:solidFill>
                 <a:latin typeface="Amiri" pitchFamily="2" charset="-78"/>
+                <a:ea typeface="Amiri" pitchFamily="2" charset="-78"/>
                 <a:cs typeface="Amiri" pitchFamily="2" charset="-78"/>
               </a:rPr>
               <a:t>هَلْ تَتَأَخَّرُ عَنِ المَدْرَسَةِ؟</a:t>
@@ -23605,6 +23779,7 @@
                   <a:srgbClr val="D4AF37"/>
                 </a:solidFill>
                 <a:latin typeface="Amiri" pitchFamily="2" charset="-78"/>
+                <a:ea typeface="Amiri" pitchFamily="2" charset="-78"/>
                 <a:cs typeface="Amiri" pitchFamily="2" charset="-78"/>
               </a:rPr>
               <a:t>م</a:t>
@@ -23925,6 +24100,7 @@
                   <a:srgbClr val="8A6D1E"/>
                 </a:solidFill>
                 <a:latin typeface="Amiri" pitchFamily="2" charset="-78"/>
+                <a:ea typeface="Amiri" pitchFamily="2" charset="-78"/>
                 <a:cs typeface="Amiri" pitchFamily="2" charset="-78"/>
               </a:rPr>
               <a:t>نَمُوذَجُ الإِجَابَةِ</a:t>
@@ -24167,6 +24343,7 @@
                   <a:srgbClr val="1B3B6F"/>
                 </a:solidFill>
                 <a:latin typeface="Amiri" pitchFamily="2" charset="-78"/>
+                <a:ea typeface="Amiri" pitchFamily="2" charset="-78"/>
                 <a:cs typeface="Amiri" pitchFamily="2" charset="-78"/>
               </a:rPr>
               <a:t>عِنْدَمَا أَرْجِعُ مِنَ المَدْرَسَةِ أَتَنَاوَلُ الغَدَاءَ، ثُمَّ أُنْهِي وَاجِبَاتِي، وَبَعْدَ ذٰلِكَ أَلْعَبُ مَعَ أَخِي.</a:t>
@@ -24243,6 +24420,7 @@
                   <a:srgbClr val="1B3B6F"/>
                 </a:solidFill>
                 <a:latin typeface="Amiri" pitchFamily="2" charset="-78"/>
+                <a:ea typeface="Amiri" pitchFamily="2" charset="-78"/>
                 <a:cs typeface="Amiri" pitchFamily="2" charset="-78"/>
               </a:rPr>
               <a:t>صِفْ مَاذَا تَفْعَلُ بَعْدَ المَدْرَسَةِ بِالتَّرْتِيبِ.</a:t>
@@ -24346,6 +24524,7 @@
                   <a:srgbClr val="1B3B6F"/>
                 </a:solidFill>
                 <a:latin typeface="Amiri" pitchFamily="2" charset="-78"/>
+                <a:ea typeface="Amiri" pitchFamily="2" charset="-78"/>
                 <a:cs typeface="Amiri" pitchFamily="2" charset="-78"/>
               </a:rPr>
               <a:t>أَتَّصِلُ بِخَالَتِي مَرَّةً فِي الأُسْبُوعِ، لِأَنَّهَا تَسْكُنُ فِي بَاكِسْتَانَ وَنَشْتَاقُ إِلَيْهَا.</a:t>
@@ -24422,6 +24601,7 @@
                   <a:srgbClr val="1B3B6F"/>
                 </a:solidFill>
                 <a:latin typeface="Amiri" pitchFamily="2" charset="-78"/>
+                <a:ea typeface="Amiri" pitchFamily="2" charset="-78"/>
                 <a:cs typeface="Amiri" pitchFamily="2" charset="-78"/>
               </a:rPr>
               <a:t>كَمْ مَرَّةً تَتَّصِلُ بِأَقَارِبِكَ؟ لِمَاذَا؟</a:t>
@@ -24525,6 +24705,7 @@
                   <a:srgbClr val="1B3B6F"/>
                 </a:solidFill>
                 <a:latin typeface="Amiri" pitchFamily="2" charset="-78"/>
+                <a:ea typeface="Amiri" pitchFamily="2" charset="-78"/>
                 <a:cs typeface="Amiri" pitchFamily="2" charset="-78"/>
               </a:rPr>
               <a:t>قَبْلَ أَنْ أَذْهَبَ إِلَى المَدْرَسَةِ، أُرَتِّبُ حَقِيبَتِي وَأَتَنَاوَلُ الإِفْطَارَ بِسُرْعَةٍ.</a:t>
@@ -24601,6 +24782,7 @@
                   <a:srgbClr val="1B3B6F"/>
                 </a:solidFill>
                 <a:latin typeface="Amiri" pitchFamily="2" charset="-78"/>
+                <a:ea typeface="Amiri" pitchFamily="2" charset="-78"/>
                 <a:cs typeface="Amiri" pitchFamily="2" charset="-78"/>
               </a:rPr>
               <a:t>مَاذَا تَفْعَلُ عَادَةً قَبْلَ أَنْ تَذْهَبَ إِلَى المَدْرَسَةِ؟</a:t>
@@ -24704,6 +24886,7 @@
                   <a:srgbClr val="1B3B6F"/>
                 </a:solidFill>
                 <a:latin typeface="Amiri" pitchFamily="2" charset="-78"/>
+                <a:ea typeface="Amiri" pitchFamily="2" charset="-78"/>
                 <a:cs typeface="Amiri" pitchFamily="2" charset="-78"/>
               </a:rPr>
               <a:t>لَا أَشْرَبُ المَشْرُوبَاتِ الغَازِيَّةَ أَبَدًا، لِأَنَّهَا غَيْرُ صِحِّيَّةٍ.</a:t>
@@ -24780,6 +24963,7 @@
                   <a:srgbClr val="1B3B6F"/>
                 </a:solidFill>
                 <a:latin typeface="Amiri" pitchFamily="2" charset="-78"/>
+                <a:ea typeface="Amiri" pitchFamily="2" charset="-78"/>
                 <a:cs typeface="Amiri" pitchFamily="2" charset="-78"/>
               </a:rPr>
               <a:t>مَا الشَّيْءُ الَّذِي لَا تَفْعَلُهُ أَبَدًا؟</a:t>
@@ -24883,6 +25067,7 @@
                   <a:srgbClr val="1B3B6F"/>
                 </a:solidFill>
                 <a:latin typeface="Amiri" pitchFamily="2" charset="-78"/>
+                <a:ea typeface="Amiri" pitchFamily="2" charset="-78"/>
                 <a:cs typeface="Amiri" pitchFamily="2" charset="-78"/>
               </a:rPr>
               <a:t>بَعْدَ أَنْ رَجَعْتُ إِلَى البَيْتِ، اتَّصَلْتُ بِصَدِيقِي، ثُمَّ ذَاكَرْنَا مَعًا عَلَى الإِنْتَرْنِتِ.</a:t>
@@ -24959,6 +25144,7 @@
                   <a:srgbClr val="1B3B6F"/>
                 </a:solidFill>
                 <a:latin typeface="Amiri" pitchFamily="2" charset="-78"/>
+                <a:ea typeface="Amiri" pitchFamily="2" charset="-78"/>
                 <a:cs typeface="Amiri" pitchFamily="2" charset="-78"/>
               </a:rPr>
               <a:t>مَاذَا فَعَلْتَ أَمْسِ بَعْدَ أَنْ رَجَعْتَ إِلَى البَيْتِ؟</a:t>
@@ -25168,6 +25354,7 @@
                   <a:srgbClr val="D4AF37"/>
                 </a:solidFill>
                 <a:latin typeface="Amiri" pitchFamily="2" charset="-78"/>
+                <a:ea typeface="Amiri" pitchFamily="2" charset="-78"/>
                 <a:cs typeface="Amiri" pitchFamily="2" charset="-78"/>
               </a:rPr>
               <a:t>م</a:t>
@@ -25488,6 +25675,7 @@
                   <a:srgbClr val="8A6D1E"/>
                 </a:solidFill>
                 <a:latin typeface="Amiri" pitchFamily="2" charset="-78"/>
+                <a:ea typeface="Amiri" pitchFamily="2" charset="-78"/>
                 <a:cs typeface="Amiri" pitchFamily="2" charset="-78"/>
               </a:rPr>
               <a:t>نَمُوذَجُ الإِجَابَةِ</a:t>
@@ -25730,6 +25918,7 @@
                   <a:srgbClr val="1B3B6F"/>
                 </a:solidFill>
                 <a:latin typeface="Amiri" pitchFamily="2" charset="-78"/>
+                <a:ea typeface="Amiri" pitchFamily="2" charset="-78"/>
                 <a:cs typeface="Amiri" pitchFamily="2" charset="-78"/>
               </a:rPr>
               <a:t>فِي المَاضِي كَانَ النَّاسُ يَكْتُبُونَ رَسَائِلَ وَرَقِيَّةً، أَمَّا اليَوْمَ فَنَتَوَاصَلُ فَوْرًا بِالهَاتِفِ وَالإِنْتَرْنِتِ.</a:t>
@@ -25806,6 +25995,7 @@
                   <a:srgbClr val="1B3B6F"/>
                 </a:solidFill>
                 <a:latin typeface="Amiri" pitchFamily="2" charset="-78"/>
+                <a:ea typeface="Amiri" pitchFamily="2" charset="-78"/>
                 <a:cs typeface="Amiri" pitchFamily="2" charset="-78"/>
               </a:rPr>
               <a:t>كَيْفَ تَغَيَّرَ التَّوَاصُلُ بَيْنَ النَّاسِ فِي رَأْيِكَ؟</a:t>
@@ -25909,6 +26099,7 @@
                   <a:srgbClr val="1B3B6F"/>
                 </a:solidFill>
                 <a:latin typeface="Amiri" pitchFamily="2" charset="-78"/>
+                <a:ea typeface="Amiri" pitchFamily="2" charset="-78"/>
                 <a:cs typeface="Amiri" pitchFamily="2" charset="-78"/>
               </a:rPr>
               <a:t>أَعْتَقِدُ أَنَّ كَثِيرًا مِنَ الشَّبَابِ يَقْضُونَ وَقْتًا طَوِيلًا عَلَيْهَا، لِأَنَّهُمْ يَدْرُسُونَ وَيَلْعَبُونَ وَيَتَوَاصَلُونَ بِهَا.</a:t>
@@ -25985,6 +26176,7 @@
                   <a:srgbClr val="1B3B6F"/>
                 </a:solidFill>
                 <a:latin typeface="Amiri" pitchFamily="2" charset="-78"/>
+                <a:ea typeface="Amiri" pitchFamily="2" charset="-78"/>
                 <a:cs typeface="Amiri" pitchFamily="2" charset="-78"/>
               </a:rPr>
               <a:t>هَلْ يَقْضِي الشَّبَابُ وَقْتًا طَوِيلًا عَلَى الشَّاشَاتِ؟</a:t>
@@ -26088,6 +26280,7 @@
                   <a:srgbClr val="1B3B6F"/>
                 </a:solidFill>
                 <a:latin typeface="Amiri" pitchFamily="2" charset="-78"/>
+                <a:ea typeface="Amiri" pitchFamily="2" charset="-78"/>
                 <a:cs typeface="Amiri" pitchFamily="2" charset="-78"/>
               </a:rPr>
               <a:t>دَائِمًا أَكْتُبُ قَائِمَةً بِالمَهَامِّ قَبْلَ أَنْ أَنَامَ، وَعِنْدَمَا أَسْتَيْقِظُ أَبْدَأُ بِأَصْعَبِهَا.</a:t>
@@ -26164,6 +26357,7 @@
                   <a:srgbClr val="1B3B6F"/>
                 </a:solidFill>
                 <a:latin typeface="Amiri" pitchFamily="2" charset="-78"/>
+                <a:ea typeface="Amiri" pitchFamily="2" charset="-78"/>
                 <a:cs typeface="Amiri" pitchFamily="2" charset="-78"/>
               </a:rPr>
               <a:t>مَا الَّذِي تَفْعَلُهُ دَائِمًا لِتُنَظِّمَ يَوْمَكَ؟</a:t>
@@ -26373,6 +26567,7 @@
                   <a:srgbClr val="D4AF37"/>
                 </a:solidFill>
                 <a:latin typeface="Amiri" pitchFamily="2" charset="-78"/>
+                <a:ea typeface="Amiri" pitchFamily="2" charset="-78"/>
                 <a:cs typeface="Amiri" pitchFamily="2" charset="-78"/>
               </a:rPr>
               <a:t>م</a:t>
@@ -26693,6 +26888,7 @@
                   <a:srgbClr val="8A6D1E"/>
                 </a:solidFill>
                 <a:latin typeface="Amiri" pitchFamily="2" charset="-78"/>
+                <a:ea typeface="Amiri" pitchFamily="2" charset="-78"/>
                 <a:cs typeface="Amiri" pitchFamily="2" charset="-78"/>
               </a:rPr>
               <a:t>نَمُوذَجُ الإِجَابَةِ</a:t>
@@ -26935,6 +27131,7 @@
                   <a:srgbClr val="1B3B6F"/>
                 </a:solidFill>
                 <a:latin typeface="Amiri" pitchFamily="2" charset="-78"/>
+                <a:ea typeface="Amiri" pitchFamily="2" charset="-78"/>
                 <a:cs typeface="Amiri" pitchFamily="2" charset="-78"/>
               </a:rPr>
               <a:t>فِي العِيدِ المَاضِي اتَّصَلْتُ بِجَدِّي فِي مِصْرَ بِالفِيدْيُو، فَرَأَى أُسْرَتَنَا كُلَّهَا وَفَرِحَ كَثِيرًا.</a:t>
@@ -27011,6 +27208,7 @@
                   <a:srgbClr val="1B3B6F"/>
                 </a:solidFill>
                 <a:latin typeface="Amiri" pitchFamily="2" charset="-78"/>
+                <a:ea typeface="Amiri" pitchFamily="2" charset="-78"/>
                 <a:cs typeface="Amiri" pitchFamily="2" charset="-78"/>
               </a:rPr>
               <a:t>صِفْ مُكَالَمَةً مُهِمَّةً أَجْرَيْتَهَا.</a:t>
@@ -27114,6 +27312,7 @@
                   <a:srgbClr val="1B3B6F"/>
                 </a:solidFill>
                 <a:latin typeface="Amiri" pitchFamily="2" charset="-78"/>
+                <a:ea typeface="Amiri" pitchFamily="2" charset="-78"/>
                 <a:cs typeface="Amiri" pitchFamily="2" charset="-78"/>
               </a:rPr>
               <a:t>لَوْ لَمْ يَكُنْ هُنَاكَ هَاتِفٌ، لَكَتَبْتُ رَسَائِلَ لِأَصْدِقَائِي، وَلَزُرْتُهُمْ أَكْثَرَ.</a:t>
@@ -27190,6 +27389,7 @@
                   <a:srgbClr val="1B3B6F"/>
                 </a:solidFill>
                 <a:latin typeface="Amiri" pitchFamily="2" charset="-78"/>
+                <a:ea typeface="Amiri" pitchFamily="2" charset="-78"/>
                 <a:cs typeface="Amiri" pitchFamily="2" charset="-78"/>
               </a:rPr>
               <a:t>لَوْ لَمْ يَكُنْ هُنَاكَ هَاتِفٌ، كَيْفَ تَتَوَاصَلُ؟</a:t>
@@ -27399,6 +27599,7 @@
                   <a:srgbClr val="D4AF37"/>
                 </a:solidFill>
                 <a:latin typeface="Amiri" pitchFamily="2" charset="-78"/>
+                <a:ea typeface="Amiri" pitchFamily="2" charset="-78"/>
                 <a:cs typeface="Amiri" pitchFamily="2" charset="-78"/>
               </a:rPr>
               <a:t>م</a:t>
@@ -27719,6 +27920,7 @@
                   <a:srgbClr val="8A6D1E"/>
                 </a:solidFill>
                 <a:latin typeface="Amiri" pitchFamily="2" charset="-78"/>
+                <a:ea typeface="Amiri" pitchFamily="2" charset="-78"/>
                 <a:cs typeface="Amiri" pitchFamily="2" charset="-78"/>
               </a:rPr>
               <a:t>قَيِّمْ عَمَلَكَ</a:t>
@@ -28963,6 +29165,7 @@
                   <a:srgbClr val="FFFFFF"/>
                 </a:solidFill>
                 <a:latin typeface="Amiri" pitchFamily="2" charset="-78"/>
+                <a:ea typeface="Amiri" pitchFamily="2" charset="-78"/>
                 <a:cs typeface="Amiri" pitchFamily="2" charset="-78"/>
               </a:rPr>
               <a:t>أَحْسَنْتُمْ! إِلَى اللِّقَاءِ</a:t>
@@ -29115,6 +29318,7 @@
                   <a:srgbClr val="D4AF37"/>
                 </a:solidFill>
                 <a:latin typeface="Amiri" pitchFamily="2" charset="-78"/>
+                <a:ea typeface="Amiri" pitchFamily="2" charset="-78"/>
                 <a:cs typeface="Amiri" pitchFamily="2" charset="-78"/>
               </a:rPr>
               <a:t>وَرْشَةُ الكِتَابَةِ</a:t>
@@ -29248,6 +29452,7 @@
                   <a:srgbClr val="D4AF37"/>
                 </a:solidFill>
                 <a:latin typeface="Amiri" pitchFamily="2" charset="-78"/>
+                <a:ea typeface="Amiri" pitchFamily="2" charset="-78"/>
                 <a:cs typeface="Amiri" pitchFamily="2" charset="-78"/>
               </a:rPr>
               <a:t>م</a:t>
@@ -29568,6 +29773,7 @@
                   <a:srgbClr val="8A6D1E"/>
                 </a:solidFill>
                 <a:latin typeface="Amiri" pitchFamily="2" charset="-78"/>
+                <a:ea typeface="Amiri" pitchFamily="2" charset="-78"/>
                 <a:cs typeface="Amiri" pitchFamily="2" charset="-78"/>
               </a:rPr>
               <a:t>خَرِيطَةُ الوَرْشَةِ</a:t>
@@ -29882,6 +30088,7 @@
                   <a:srgbClr val="1B3B6F"/>
                 </a:solidFill>
                 <a:latin typeface="Amiri" pitchFamily="2" charset="-78"/>
+                <a:ea typeface="Amiri" pitchFamily="2" charset="-78"/>
                 <a:cs typeface="Amiri" pitchFamily="2" charset="-78"/>
               </a:rPr>
               <a:t>كَيْفَ</a:t>
@@ -30158,6 +30365,7 @@
                   <a:srgbClr val="1E6B52"/>
                 </a:solidFill>
                 <a:latin typeface="Amiri" pitchFamily="2" charset="-78"/>
+                <a:ea typeface="Amiri" pitchFamily="2" charset="-78"/>
                 <a:cs typeface="Amiri" pitchFamily="2" charset="-78"/>
               </a:rPr>
               <a:t>تَمْثِيلُ الدَّوْرِ</a:t>
@@ -30434,6 +30642,7 @@
                   <a:srgbClr val="8A6D1E"/>
                 </a:solidFill>
                 <a:latin typeface="Amiri" pitchFamily="2" charset="-78"/>
+                <a:ea typeface="Amiri" pitchFamily="2" charset="-78"/>
                 <a:cs typeface="Amiri" pitchFamily="2" charset="-78"/>
               </a:rPr>
               <a:t>النَّمُوذَجُ</a:t>
@@ -30710,6 +30919,7 @@
                   <a:srgbClr val="1E6B52"/>
                 </a:solidFill>
                 <a:latin typeface="Amiri" pitchFamily="2" charset="-78"/>
+                <a:ea typeface="Amiri" pitchFamily="2" charset="-78"/>
                 <a:cs typeface="Amiri" pitchFamily="2" charset="-78"/>
               </a:rPr>
               <a:t>المُحَادَثَةُ</a:t>
@@ -30986,6 +31196,7 @@
                   <a:srgbClr val="8A6D1E"/>
                 </a:solidFill>
                 <a:latin typeface="Amiri" pitchFamily="2" charset="-78"/>
+                <a:ea typeface="Amiri" pitchFamily="2" charset="-78"/>
                 <a:cs typeface="Amiri" pitchFamily="2" charset="-78"/>
               </a:rPr>
               <a:t>قَيِّمْ</a:t>
@@ -31229,6 +31440,7 @@
                   <a:srgbClr val="D4AF37"/>
                 </a:solidFill>
                 <a:latin typeface="Amiri" pitchFamily="2" charset="-78"/>
+                <a:ea typeface="Amiri" pitchFamily="2" charset="-78"/>
                 <a:cs typeface="Amiri" pitchFamily="2" charset="-78"/>
               </a:rPr>
               <a:t>م</a:t>
@@ -31549,6 +31761,7 @@
                   <a:srgbClr val="8A6D1E"/>
                 </a:solidFill>
                 <a:latin typeface="Amiri" pitchFamily="2" charset="-78"/>
+                <a:ea typeface="Amiri" pitchFamily="2" charset="-78"/>
                 <a:cs typeface="Amiri" pitchFamily="2" charset="-78"/>
               </a:rPr>
               <a:t>امْتِحَانُ التَّحَدُّثِ</a:t>
@@ -32173,6 +32386,7 @@
                   <a:srgbClr val="1B3B6F"/>
                 </a:solidFill>
                 <a:latin typeface="Amiri" pitchFamily="2" charset="-78"/>
+                <a:ea typeface="Amiri" pitchFamily="2" charset="-78"/>
                 <a:cs typeface="Amiri" pitchFamily="2" charset="-78"/>
               </a:rPr>
               <a:t>عَفْوًا، هَلْ يُمْكِنُ أَنْ تُعِيدَ السُّؤَالَ؟</a:t>
@@ -32272,6 +32486,7 @@
                   <a:srgbClr val="1B3B6F"/>
                 </a:solidFill>
                 <a:latin typeface="Amiri" pitchFamily="2" charset="-78"/>
+                <a:ea typeface="Amiri" pitchFamily="2" charset="-78"/>
                 <a:cs typeface="Amiri" pitchFamily="2" charset="-78"/>
               </a:rPr>
               <a:t>لَحْظَةً، دَعْنِي أُفَكِّرُ …</a:t>
@@ -32371,6 +32586,7 @@
                   <a:srgbClr val="1B3B6F"/>
                 </a:solidFill>
                 <a:latin typeface="Amiri" pitchFamily="2" charset="-78"/>
+                <a:ea typeface="Amiri" pitchFamily="2" charset="-78"/>
                 <a:cs typeface="Amiri" pitchFamily="2" charset="-78"/>
               </a:rPr>
               <a:t>أَقْصِدُ …</a:t>
@@ -32542,6 +32758,7 @@
                   <a:srgbClr val="D4AF37"/>
                 </a:solidFill>
                 <a:latin typeface="Amiri" pitchFamily="2" charset="-78"/>
+                <a:ea typeface="Amiri" pitchFamily="2" charset="-78"/>
                 <a:cs typeface="Amiri" pitchFamily="2" charset="-78"/>
               </a:rPr>
               <a:t>م</a:t>
@@ -32862,6 +33079,7 @@
                   <a:srgbClr val="8A6D1E"/>
                 </a:solidFill>
                 <a:latin typeface="Amiri" pitchFamily="2" charset="-78"/>
+                <a:ea typeface="Amiri" pitchFamily="2" charset="-78"/>
                 <a:cs typeface="Amiri" pitchFamily="2" charset="-78"/>
               </a:rPr>
               <a:t>كَمْ مَرَّةً؟</a:t>
@@ -33165,6 +33383,7 @@
                   <a:srgbClr val="1B3B6F"/>
                 </a:solidFill>
                 <a:latin typeface="Amiri" pitchFamily="2" charset="-78"/>
+                <a:ea typeface="Amiri" pitchFamily="2" charset="-78"/>
                 <a:cs typeface="Amiri" pitchFamily="2" charset="-78"/>
               </a:rPr>
               <a:t>دَائِمًا</a:t>
@@ -33484,6 +33703,7 @@
                   <a:srgbClr val="1B3B6F"/>
                 </a:solidFill>
                 <a:latin typeface="Amiri" pitchFamily="2" charset="-78"/>
+                <a:ea typeface="Amiri" pitchFamily="2" charset="-78"/>
                 <a:cs typeface="Amiri" pitchFamily="2" charset="-78"/>
               </a:rPr>
               <a:t>غَالِبًا</a:t>
@@ -33803,6 +34023,7 @@
                   <a:srgbClr val="1B3B6F"/>
                 </a:solidFill>
                 <a:latin typeface="Amiri" pitchFamily="2" charset="-78"/>
+                <a:ea typeface="Amiri" pitchFamily="2" charset="-78"/>
                 <a:cs typeface="Amiri" pitchFamily="2" charset="-78"/>
               </a:rPr>
               <a:t>أَحْيَانًا</a:t>
@@ -34122,6 +34343,7 @@
                   <a:srgbClr val="1B3B6F"/>
                 </a:solidFill>
                 <a:latin typeface="Amiri" pitchFamily="2" charset="-78"/>
+                <a:ea typeface="Amiri" pitchFamily="2" charset="-78"/>
                 <a:cs typeface="Amiri" pitchFamily="2" charset="-78"/>
               </a:rPr>
               <a:t>نَادِرًا</a:t>
@@ -34441,6 +34663,7 @@
                   <a:srgbClr val="1B3B6F"/>
                 </a:solidFill>
                 <a:latin typeface="Amiri" pitchFamily="2" charset="-78"/>
+                <a:ea typeface="Amiri" pitchFamily="2" charset="-78"/>
                 <a:cs typeface="Amiri" pitchFamily="2" charset="-78"/>
               </a:rPr>
               <a:t>أَبَدًا</a:t>
@@ -34474,11 +34697,12 @@
               <a:buNone/>
             </a:pPr>
             <a:r>
-              <a:rPr lang="en-US" sz="1350" b="1" dirty="0">
+              <a:rPr lang="ar-SA" sz="1350" b="1" dirty="0">
                 <a:solidFill>
                   <a:srgbClr val="1F2A37"/>
                 </a:solidFill>
                 <a:latin typeface="Calibri" pitchFamily="34" charset="0"/>
+                <a:ea typeface="Amiri" pitchFamily="2" charset="-78"/>
                 <a:cs typeface="Amiri" pitchFamily="2" charset="-78"/>
               </a:rPr>
               <a:t>never (لَا … أَبَدًا)</a:t>
@@ -34760,6 +34984,7 @@
                   <a:srgbClr val="1B3B6F"/>
                 </a:solidFill>
                 <a:latin typeface="Amiri" pitchFamily="2" charset="-78"/>
+                <a:ea typeface="Amiri" pitchFamily="2" charset="-78"/>
                 <a:cs typeface="Amiri" pitchFamily="2" charset="-78"/>
               </a:rPr>
               <a:t>مَرَّةً</a:t>
@@ -34917,6 +35142,7 @@
                   <a:srgbClr val="1B3B6F"/>
                 </a:solidFill>
                 <a:latin typeface="Amiri" pitchFamily="2" charset="-78"/>
+                <a:ea typeface="Amiri" pitchFamily="2" charset="-78"/>
                 <a:cs typeface="Amiri" pitchFamily="2" charset="-78"/>
               </a:rPr>
               <a:t>ثَلَاثَ مَرَّاتٍ</a:t>
@@ -35020,6 +35246,7 @@
                   <a:srgbClr val="1B3B6F"/>
                 </a:solidFill>
                 <a:latin typeface="Amiri" pitchFamily="2" charset="-78"/>
+                <a:ea typeface="Amiri" pitchFamily="2" charset="-78"/>
                 <a:cs typeface="Amiri" pitchFamily="2" charset="-78"/>
               </a:rPr>
               <a:t>مَرَّتَيْنِ</a:t>
@@ -35123,6 +35350,7 @@
                   <a:srgbClr val="1B3B6F"/>
                 </a:solidFill>
                 <a:latin typeface="Amiri" pitchFamily="2" charset="-78"/>
+                <a:ea typeface="Amiri" pitchFamily="2" charset="-78"/>
                 <a:cs typeface="Amiri" pitchFamily="2" charset="-78"/>
               </a:rPr>
               <a:t>مَرَّةً</a:t>
@@ -35256,6 +35484,7 @@
                   <a:srgbClr val="D4AF37"/>
                 </a:solidFill>
                 <a:latin typeface="Amiri" pitchFamily="2" charset="-78"/>
+                <a:ea typeface="Amiri" pitchFamily="2" charset="-78"/>
                 <a:cs typeface="Amiri" pitchFamily="2" charset="-78"/>
               </a:rPr>
               <a:t>م</a:t>
@@ -35576,6 +35805,7 @@
                   <a:srgbClr val="8A6D1E"/>
                 </a:solidFill>
                 <a:latin typeface="Amiri" pitchFamily="2" charset="-78"/>
+                <a:ea typeface="Amiri" pitchFamily="2" charset="-78"/>
                 <a:cs typeface="Amiri" pitchFamily="2" charset="-78"/>
               </a:rPr>
               <a:t>التَّوَاصُلُ وَالرَّبْطُ</a:t>
@@ -35879,6 +36109,7 @@
                   <a:srgbClr val="1B3B6F"/>
                 </a:solidFill>
                 <a:latin typeface="Amiri" pitchFamily="2" charset="-78"/>
+                <a:ea typeface="Amiri" pitchFamily="2" charset="-78"/>
                 <a:cs typeface="Amiri" pitchFamily="2" charset="-78"/>
               </a:rPr>
               <a:t>أَتَوَاصَلُ</a:t>
@@ -36036,6 +36267,7 @@
                   <a:srgbClr val="1B3B6F"/>
                 </a:solidFill>
                 <a:latin typeface="Amiri" pitchFamily="2" charset="-78"/>
+                <a:ea typeface="Amiri" pitchFamily="2" charset="-78"/>
                 <a:cs typeface="Amiri" pitchFamily="2" charset="-78"/>
               </a:rPr>
               <a:t>يَتَوَاصَلُونَ</a:t>
@@ -36139,6 +36371,7 @@
                   <a:srgbClr val="1B3B6F"/>
                 </a:solidFill>
                 <a:latin typeface="Amiri" pitchFamily="2" charset="-78"/>
+                <a:ea typeface="Amiri" pitchFamily="2" charset="-78"/>
                 <a:cs typeface="Amiri" pitchFamily="2" charset="-78"/>
               </a:rPr>
               <a:t>تَتَوَاصَلُ</a:t>
@@ -36242,6 +36475,7 @@
                   <a:srgbClr val="1B3B6F"/>
                 </a:solidFill>
                 <a:latin typeface="Amiri" pitchFamily="2" charset="-78"/>
+                <a:ea typeface="Amiri" pitchFamily="2" charset="-78"/>
                 <a:cs typeface="Amiri" pitchFamily="2" charset="-78"/>
               </a:rPr>
               <a:t>يَتَوَاصَلُ</a:t>
@@ -36507,6 +36741,7 @@
                   <a:srgbClr val="1B3B6F"/>
                 </a:solidFill>
                 <a:latin typeface="Amiri" pitchFamily="2" charset="-78"/>
+                <a:ea typeface="Amiri" pitchFamily="2" charset="-78"/>
                 <a:cs typeface="Amiri" pitchFamily="2" charset="-78"/>
               </a:rPr>
               <a:t>أُرْسِلُ</a:t>
@@ -36664,6 +36899,7 @@
                   <a:srgbClr val="1B3B6F"/>
                 </a:solidFill>
                 <a:latin typeface="Amiri" pitchFamily="2" charset="-78"/>
+                <a:ea typeface="Amiri" pitchFamily="2" charset="-78"/>
                 <a:cs typeface="Amiri" pitchFamily="2" charset="-78"/>
               </a:rPr>
               <a:t>يُرْسِلُونَ</a:t>
@@ -36767,6 +37003,7 @@
                   <a:srgbClr val="1B3B6F"/>
                 </a:solidFill>
                 <a:latin typeface="Amiri" pitchFamily="2" charset="-78"/>
+                <a:ea typeface="Amiri" pitchFamily="2" charset="-78"/>
                 <a:cs typeface="Amiri" pitchFamily="2" charset="-78"/>
               </a:rPr>
               <a:t>تُرْسِلُ</a:t>
@@ -36870,6 +37107,7 @@
                   <a:srgbClr val="1B3B6F"/>
                 </a:solidFill>
                 <a:latin typeface="Amiri" pitchFamily="2" charset="-78"/>
+                <a:ea typeface="Amiri" pitchFamily="2" charset="-78"/>
                 <a:cs typeface="Amiri" pitchFamily="2" charset="-78"/>
               </a:rPr>
               <a:t>يُرْسِلُ</a:t>
@@ -37135,6 +37373,7 @@
                   <a:srgbClr val="1B3B6F"/>
                 </a:solidFill>
                 <a:latin typeface="Amiri" pitchFamily="2" charset="-78"/>
+                <a:ea typeface="Amiri" pitchFamily="2" charset="-78"/>
                 <a:cs typeface="Amiri" pitchFamily="2" charset="-78"/>
               </a:rPr>
               <a:t>أَتَّصِلُ بِجَدِّي</a:t>
@@ -37292,6 +37531,7 @@
                   <a:srgbClr val="1B3B6F"/>
                 </a:solidFill>
                 <a:latin typeface="Amiri" pitchFamily="2" charset="-78"/>
+                <a:ea typeface="Amiri" pitchFamily="2" charset="-78"/>
                 <a:cs typeface="Amiri" pitchFamily="2" charset="-78"/>
               </a:rPr>
               <a:t>يَتَّصِلُونَ</a:t>
@@ -37395,6 +37635,7 @@
                   <a:srgbClr val="1B3B6F"/>
                 </a:solidFill>
                 <a:latin typeface="Amiri" pitchFamily="2" charset="-78"/>
+                <a:ea typeface="Amiri" pitchFamily="2" charset="-78"/>
                 <a:cs typeface="Amiri" pitchFamily="2" charset="-78"/>
               </a:rPr>
               <a:t>تَتَّصِلُ</a:t>
@@ -37498,6 +37739,7 @@
                   <a:srgbClr val="1B3B6F"/>
                 </a:solidFill>
                 <a:latin typeface="Amiri" pitchFamily="2" charset="-78"/>
+                <a:ea typeface="Amiri" pitchFamily="2" charset="-78"/>
                 <a:cs typeface="Amiri" pitchFamily="2" charset="-78"/>
               </a:rPr>
               <a:t>يَتَّصِلُ</a:t>
@@ -37763,6 +38005,7 @@
                   <a:srgbClr val="1B3B6F"/>
                 </a:solidFill>
                 <a:latin typeface="Amiri" pitchFamily="2" charset="-78"/>
+                <a:ea typeface="Amiri" pitchFamily="2" charset="-78"/>
                 <a:cs typeface="Amiri" pitchFamily="2" charset="-78"/>
               </a:rPr>
               <a:t>رِسَالَةٌ</a:t>
@@ -37920,6 +38163,7 @@
                   <a:srgbClr val="1B3B6F"/>
                 </a:solidFill>
                 <a:latin typeface="Amiri" pitchFamily="2" charset="-78"/>
+                <a:ea typeface="Amiri" pitchFamily="2" charset="-78"/>
                 <a:cs typeface="Amiri" pitchFamily="2" charset="-78"/>
               </a:rPr>
               <a:t>رَسَائِلُ</a:t>
@@ -38023,6 +38267,7 @@
                   <a:srgbClr val="1B3B6F"/>
                 </a:solidFill>
                 <a:latin typeface="Amiri" pitchFamily="2" charset="-78"/>
+                <a:ea typeface="Amiri" pitchFamily="2" charset="-78"/>
                 <a:cs typeface="Amiri" pitchFamily="2" charset="-78"/>
               </a:rPr>
               <a:t>رِسَالَتَانِ</a:t>
@@ -38126,6 +38371,7 @@
                   <a:srgbClr val="1B3B6F"/>
                 </a:solidFill>
                 <a:latin typeface="Amiri" pitchFamily="2" charset="-78"/>
+                <a:ea typeface="Amiri" pitchFamily="2" charset="-78"/>
                 <a:cs typeface="Amiri" pitchFamily="2" charset="-78"/>
               </a:rPr>
               <a:t>رِسَالَةٌ</a:t>
@@ -38391,6 +38637,7 @@
                   <a:srgbClr val="1B3B6F"/>
                 </a:solidFill>
                 <a:latin typeface="Amiri" pitchFamily="2" charset="-78"/>
+                <a:ea typeface="Amiri" pitchFamily="2" charset="-78"/>
                 <a:cs typeface="Amiri" pitchFamily="2" charset="-78"/>
               </a:rPr>
               <a:t>قَبْلَ أَنْ · بَعْدَ أَنْ</a:t>
@@ -38710,6 +38957,7 @@
                   <a:srgbClr val="1B3B6F"/>
                 </a:solidFill>
                 <a:latin typeface="Amiri" pitchFamily="2" charset="-78"/>
+                <a:ea typeface="Amiri" pitchFamily="2" charset="-78"/>
                 <a:cs typeface="Amiri" pitchFamily="2" charset="-78"/>
               </a:rPr>
               <a:t>عِنْدَمَا</a:t>
@@ -38897,6 +39145,7 @@
                   <a:srgbClr val="D4AF37"/>
                 </a:solidFill>
                 <a:latin typeface="Amiri" pitchFamily="2" charset="-78"/>
+                <a:ea typeface="Amiri" pitchFamily="2" charset="-78"/>
                 <a:cs typeface="Amiri" pitchFamily="2" charset="-78"/>
               </a:rPr>
               <a:t>م</a:t>
@@ -39217,6 +39466,7 @@
                   <a:srgbClr val="8A6D1E"/>
                 </a:solidFill>
                 <a:latin typeface="Amiri" pitchFamily="2" charset="-78"/>
+                <a:ea typeface="Amiri" pitchFamily="2" charset="-78"/>
                 <a:cs typeface="Amiri" pitchFamily="2" charset="-78"/>
               </a:rPr>
               <a:t>فِي الغُرَفِ</a:t>
@@ -40393,6 +40643,7 @@
                   <a:srgbClr val="1B3B6F"/>
                 </a:solidFill>
                 <a:latin typeface="Amiri" pitchFamily="2" charset="-78"/>
+                <a:ea typeface="Amiri" pitchFamily="2" charset="-78"/>
                 <a:cs typeface="Amiri" pitchFamily="2" charset="-78"/>
               </a:rPr>
               <a:t>دَوْرُكَ!</a:t>
@@ -40469,6 +40720,7 @@
                   <a:srgbClr val="1B3B6F"/>
                 </a:solidFill>
                 <a:latin typeface="Amiri" pitchFamily="2" charset="-78"/>
+                <a:ea typeface="Amiri" pitchFamily="2" charset="-78"/>
                 <a:cs typeface="Amiri" pitchFamily="2" charset="-78"/>
               </a:rPr>
               <a:t>أَحْسَنْتَ! / أَحْسَنْتِ!</a:t>
@@ -40545,6 +40797,7 @@
                   <a:srgbClr val="1B3B6F"/>
                 </a:solidFill>
                 <a:latin typeface="Amiri" pitchFamily="2" charset="-78"/>
+                <a:ea typeface="Amiri" pitchFamily="2" charset="-78"/>
                 <a:cs typeface="Amiri" pitchFamily="2" charset="-78"/>
               </a:rPr>
               <a:t>تَكَلَّمْ أَكْثَرَ، مِنْ فَضْلِكَ</a:t>
@@ -40621,6 +40874,7 @@
                   <a:srgbClr val="1B3B6F"/>
                 </a:solidFill>
                 <a:latin typeface="Amiri" pitchFamily="2" charset="-78"/>
+                <a:ea typeface="Amiri" pitchFamily="2" charset="-78"/>
                 <a:cs typeface="Amiri" pitchFamily="2" charset="-78"/>
               </a:rPr>
               <a:t>لِمَاذَا؟</a:t>
@@ -40792,6 +41046,7 @@
                   <a:srgbClr val="D4AF37"/>
                 </a:solidFill>
                 <a:latin typeface="Amiri" pitchFamily="2" charset="-78"/>
+                <a:ea typeface="Amiri" pitchFamily="2" charset="-78"/>
                 <a:cs typeface="Amiri" pitchFamily="2" charset="-78"/>
               </a:rPr>
               <a:t>م</a:t>
@@ -41112,6 +41367,7 @@
                   <a:srgbClr val="8A6D1E"/>
                 </a:solidFill>
                 <a:latin typeface="Amiri" pitchFamily="2" charset="-78"/>
+                <a:ea typeface="Amiri" pitchFamily="2" charset="-78"/>
                 <a:cs typeface="Amiri" pitchFamily="2" charset="-78"/>
               </a:rPr>
               <a:t>اسْتِبْيَانُ نَادِي الشَّبَابِ</a:t>
@@ -41392,6 +41648,7 @@
                   <a:srgbClr val="1B3B6F"/>
                 </a:solidFill>
                 <a:latin typeface="Amiri" pitchFamily="2" charset="-78"/>
+                <a:ea typeface="Amiri" pitchFamily="2" charset="-78"/>
                 <a:cs typeface="Amiri" pitchFamily="2" charset="-78"/>
               </a:rPr>
               <a:t>آتِي … فِي الأُسْبُوعِ</a:t>
@@ -41468,6 +41725,7 @@
                   <a:srgbClr val="1B3B6F"/>
                 </a:solidFill>
                 <a:latin typeface="Amiri" pitchFamily="2" charset="-78"/>
+                <a:ea typeface="Amiri" pitchFamily="2" charset="-78"/>
                 <a:cs typeface="Amiri" pitchFamily="2" charset="-78"/>
               </a:rPr>
               <a:t>كَمْ مَرَّةً تَأْتِي إِلَى النَّادِي فِي الأُسْبُوعِ؟</a:t>
@@ -41636,6 +41894,7 @@
                   <a:srgbClr val="1B3B6F"/>
                 </a:solidFill>
                 <a:latin typeface="Amiri" pitchFamily="2" charset="-78"/>
+                <a:ea typeface="Amiri" pitchFamily="2" charset="-78"/>
                 <a:cs typeface="Amiri" pitchFamily="2" charset="-78"/>
               </a:rPr>
               <a:t>عَادَةً أَلْعَبُ …</a:t>
@@ -41712,6 +41971,7 @@
                   <a:srgbClr val="1B3B6F"/>
                 </a:solidFill>
                 <a:latin typeface="Amiri" pitchFamily="2" charset="-78"/>
+                <a:ea typeface="Amiri" pitchFamily="2" charset="-78"/>
                 <a:cs typeface="Amiri" pitchFamily="2" charset="-78"/>
               </a:rPr>
               <a:t>مَاذَا تَفْعَلُ هُنَا عَادَةً؟</a:t>
@@ -41880,6 +42140,7 @@
                   <a:srgbClr val="1B3B6F"/>
                 </a:solidFill>
                 <a:latin typeface="Amiri" pitchFamily="2" charset="-78"/>
+                <a:ea typeface="Amiri" pitchFamily="2" charset="-78"/>
                 <a:cs typeface="Amiri" pitchFamily="2" charset="-78"/>
               </a:rPr>
               <a:t>لَا، لَا أَتَأَخَّرُ أَبَدًا / نَادِرًا …</a:t>
@@ -41956,6 +42217,7 @@
                   <a:srgbClr val="1B3B6F"/>
                 </a:solidFill>
                 <a:latin typeface="Amiri" pitchFamily="2" charset="-78"/>
+                <a:ea typeface="Amiri" pitchFamily="2" charset="-78"/>
                 <a:cs typeface="Amiri" pitchFamily="2" charset="-78"/>
               </a:rPr>
               <a:t>هَلْ تَتَأَخَّرُ أَحْيَانًا؟</a:t>
@@ -42124,6 +42386,7 @@
                   <a:srgbClr val="1B3B6F"/>
                 </a:solidFill>
                 <a:latin typeface="Amiri" pitchFamily="2" charset="-78"/>
+                <a:ea typeface="Amiri" pitchFamily="2" charset="-78"/>
                 <a:cs typeface="Amiri" pitchFamily="2" charset="-78"/>
               </a:rPr>
               <a:t>أُرْسِلُ رَسَائِلَ …</a:t>
@@ -42200,6 +42463,7 @@
                   <a:srgbClr val="1B3B6F"/>
                 </a:solidFill>
                 <a:latin typeface="Amiri" pitchFamily="2" charset="-78"/>
+                <a:ea typeface="Amiri" pitchFamily="2" charset="-78"/>
                 <a:cs typeface="Amiri" pitchFamily="2" charset="-78"/>
               </a:rPr>
               <a:t>كَيْفَ تَتَوَاصَلُ مَعَ أَصْدِقَائِكَ فِي النَّادِي؟</a:t>
@@ -42368,6 +42632,7 @@
                   <a:srgbClr val="1B3B6F"/>
                 </a:solidFill>
                 <a:latin typeface="Amiri" pitchFamily="2" charset="-78"/>
+                <a:ea typeface="Amiri" pitchFamily="2" charset="-78"/>
                 <a:cs typeface="Amiri" pitchFamily="2" charset="-78"/>
               </a:rPr>
               <a:t>بَعْدَ النَّادِي أَرْجِعُ …</a:t>
@@ -42444,6 +42709,7 @@
                   <a:srgbClr val="1B3B6F"/>
                 </a:solidFill>
                 <a:latin typeface="Amiri" pitchFamily="2" charset="-78"/>
+                <a:ea typeface="Amiri" pitchFamily="2" charset="-78"/>
                 <a:cs typeface="Amiri" pitchFamily="2" charset="-78"/>
               </a:rPr>
               <a:t>مَاذَا تَفْعَلُ بَعْدَ النَّادِي؟</a:t>
@@ -42718,6 +42984,7 @@
                   <a:srgbClr val="D4AF37"/>
                 </a:solidFill>
                 <a:latin typeface="Amiri" pitchFamily="2" charset="-78"/>
+                <a:ea typeface="Amiri" pitchFamily="2" charset="-78"/>
                 <a:cs typeface="Amiri" pitchFamily="2" charset="-78"/>
               </a:rPr>
               <a:t>م</a:t>
@@ -43038,6 +43305,7 @@
                   <a:srgbClr val="8A6D1E"/>
                 </a:solidFill>
                 <a:latin typeface="Amiri" pitchFamily="2" charset="-78"/>
+                <a:ea typeface="Amiri" pitchFamily="2" charset="-78"/>
                 <a:cs typeface="Amiri" pitchFamily="2" charset="-78"/>
               </a:rPr>
               <a:t>مُكَالَمَةٌ مَعَ جَدَّتِي</a:t>
@@ -43318,6 +43586,7 @@
                   <a:srgbClr val="1B3B6F"/>
                 </a:solidFill>
                 <a:latin typeface="Amiri" pitchFamily="2" charset="-78"/>
+                <a:ea typeface="Amiri" pitchFamily="2" charset="-78"/>
                 <a:cs typeface="Amiri" pitchFamily="2" charset="-78"/>
               </a:rPr>
               <a:t>أَتَّصِلُ بِكِ … فِي الشَّهْرِ</a:t>
@@ -43394,6 +43663,7 @@
                   <a:srgbClr val="1B3B6F"/>
                 </a:solidFill>
                 <a:latin typeface="Amiri" pitchFamily="2" charset="-78"/>
+                <a:ea typeface="Amiri" pitchFamily="2" charset="-78"/>
                 <a:cs typeface="Amiri" pitchFamily="2" charset="-78"/>
               </a:rPr>
               <a:t>كَمْ مَرَّةً تَتَّصِلُ بِي فِي الشَّهْرِ؟</a:t>
@@ -43562,6 +43832,7 @@
                   <a:srgbClr val="1B3B6F"/>
                 </a:solidFill>
                 <a:latin typeface="Amiri" pitchFamily="2" charset="-78"/>
+                <a:ea typeface="Amiri" pitchFamily="2" charset="-78"/>
                 <a:cs typeface="Amiri" pitchFamily="2" charset="-78"/>
               </a:rPr>
               <a:t>قَبْلَ أَنْ أَذْهَبَ … أَتَنَاوَلُ …</a:t>
@@ -43638,6 +43909,7 @@
                   <a:srgbClr val="1B3B6F"/>
                 </a:solidFill>
                 <a:latin typeface="Amiri" pitchFamily="2" charset="-78"/>
+                <a:ea typeface="Amiri" pitchFamily="2" charset="-78"/>
                 <a:cs typeface="Amiri" pitchFamily="2" charset="-78"/>
               </a:rPr>
               <a:t>مَاذَا تَفْعَلُ قَبْلَ أَنْ تَذْهَبَ إِلَى المَدْرَسَةِ؟</a:t>
@@ -43806,6 +44078,7 @@
                   <a:srgbClr val="1B3B6F"/>
                 </a:solidFill>
                 <a:latin typeface="Amiri" pitchFamily="2" charset="-78"/>
+                <a:ea typeface="Amiri" pitchFamily="2" charset="-78"/>
                 <a:cs typeface="Amiri" pitchFamily="2" charset="-78"/>
               </a:rPr>
               <a:t>عِنْدَمَا أَرْجِعُ … ثُمَّ …</a:t>
@@ -43882,6 +44155,7 @@
                   <a:srgbClr val="1B3B6F"/>
                 </a:solidFill>
                 <a:latin typeface="Amiri" pitchFamily="2" charset="-78"/>
+                <a:ea typeface="Amiri" pitchFamily="2" charset="-78"/>
                 <a:cs typeface="Amiri" pitchFamily="2" charset="-78"/>
               </a:rPr>
               <a:t>وَمَاذَا تَفْعَلُ عِنْدَمَا تَرْجِعُ إِلَى البَيْتِ؟</a:t>
@@ -43985,6 +44259,7 @@
                   <a:srgbClr val="1B3B6F"/>
                 </a:solidFill>
                 <a:latin typeface="Amiri" pitchFamily="2" charset="-78"/>
+                <a:ea typeface="Amiri" pitchFamily="2" charset="-78"/>
                 <a:cs typeface="Amiri" pitchFamily="2" charset="-78"/>
               </a:rPr>
               <a:t>مَاذَا تَفْعَلِينَ …؟</a:t>
@@ -44061,6 +44336,7 @@
                   <a:srgbClr val="1B3B6F"/>
                 </a:solidFill>
                 <a:latin typeface="Amiri" pitchFamily="2" charset="-78"/>
+                <a:ea typeface="Amiri" pitchFamily="2" charset="-78"/>
                 <a:cs typeface="Amiri" pitchFamily="2" charset="-78"/>
               </a:rPr>
               <a:t>… أُشَاهِدُ التِّلْفَازَ وَأَقْرَأُ القُرْآنَ.</a:t>
@@ -44164,6 +44440,7 @@
                   <a:srgbClr val="1B3B6F"/>
                 </a:solidFill>
                 <a:latin typeface="Amiri" pitchFamily="2" charset="-78"/>
+                <a:ea typeface="Amiri" pitchFamily="2" charset="-78"/>
                 <a:cs typeface="Amiri" pitchFamily="2" charset="-78"/>
               </a:rPr>
               <a:t>سَأَزُورُكِ …</a:t>
@@ -44240,6 +44517,7 @@
                   <a:srgbClr val="1B3B6F"/>
                 </a:solidFill>
                 <a:latin typeface="Amiri" pitchFamily="2" charset="-78"/>
+                <a:ea typeface="Amiri" pitchFamily="2" charset="-78"/>
                 <a:cs typeface="Amiri" pitchFamily="2" charset="-78"/>
               </a:rPr>
               <a:t>مَتَى سَتَزُورُنِي؟</a:t>
@@ -44414,13 +44692,9 @@
     <a:fontScheme name="Office">
       <a:majorFont>
         <a:latin typeface="Calibri Light" panose="020F0302020204030204"/>
-        <a:ea typeface=""/>
-        <a:cs typeface=""/>
-        <a:font script="Jpan" typeface="游ゴシック Light"/>
-        <a:font script="Hang" typeface="맑은 고딕"/>
-        <a:font script="Hans" typeface="等线 Light"/>
-        <a:font script="Hant" typeface="新細明體"/>
-        <a:font script="Arab" typeface="Times New Roman"/>
+        <a:ea typeface="Amiri" pitchFamily="2" charset="-78"/>
+        <a:cs typeface="Amiri" pitchFamily="2" charset="-78"/>
+        <a:font script="Arab" typeface="Amiri"/>
         <a:font script="Hebr" typeface="Times New Roman"/>
         <a:font script="Thai" typeface="Angsana New"/>
         <a:font script="Ethi" typeface="Nyala"/>
@@ -44466,13 +44740,9 @@
       </a:majorFont>
       <a:minorFont>
         <a:latin typeface="Calibri" panose="020F0502020204030204"/>
-        <a:ea typeface=""/>
-        <a:cs typeface=""/>
-        <a:font script="Jpan" typeface="游ゴシック"/>
-        <a:font script="Hang" typeface="맑은 고딕"/>
-        <a:font script="Hans" typeface="等线"/>
-        <a:font script="Hant" typeface="新細明體"/>
-        <a:font script="Arab" typeface="Arial"/>
+        <a:ea typeface="Amiri" pitchFamily="2" charset="-78"/>
+        <a:cs typeface="Amiri" pitchFamily="2" charset="-78"/>
+        <a:font script="Arab" typeface="Amiri"/>
         <a:font script="Hebr" typeface="Arial"/>
         <a:font script="Thai" typeface="Cordia New"/>
         <a:font script="Ethi" typeface="Nyala"/>
